--- a/docs/MSDS_498_Midterm.pptx
+++ b/docs/MSDS_498_Midterm.pptx
@@ -6,18 +6,21 @@
   </p:sldMasterIdLst>
   <p:sldIdLst>
     <p:sldId id="256" r:id="rId7"/>
-    <p:sldId id="257" r:id="rId8"/>
-    <p:sldId id="258" r:id="rId9"/>
-    <p:sldId id="259" r:id="rId10"/>
-    <p:sldId id="260" r:id="rId11"/>
-    <p:sldId id="261" r:id="rId12"/>
-    <p:sldId id="262" r:id="rId13"/>
-    <p:sldId id="263" r:id="rId14"/>
-    <p:sldId id="264" r:id="rId15"/>
-    <p:sldId id="265" r:id="rId16"/>
-    <p:sldId id="266" r:id="rId17"/>
-    <p:sldId id="267" r:id="rId18"/>
-    <p:sldId id="268" r:id="rId19"/>
+    <p:sldId id="257" r:id="rId9"/>
+    <p:sldId id="258" r:id="rId10"/>
+    <p:sldId id="259" r:id="rId11"/>
+    <p:sldId id="260" r:id="rId12"/>
+    <p:sldId id="261" r:id="rId13"/>
+    <p:sldId id="262" r:id="rId14"/>
+    <p:sldId id="263" r:id="rId15"/>
+    <p:sldId id="264" r:id="rId16"/>
+    <p:sldId id="265" r:id="rId17"/>
+    <p:sldId id="266" r:id="rId18"/>
+    <p:sldId id="267" r:id="rId19"/>
+    <p:sldId id="268" r:id="rId20"/>
+    <p:sldId id="269" r:id="rId21"/>
+    <p:sldId id="270" r:id="rId22"/>
+    <p:sldId id="271" r:id="rId23"/>
   </p:sldIdLst>
   <p:sldSz cx="12191695" cy="6858000" type="screen4x3"/>
   <p:notesSz cx="6858000" cy="9144000"/>
@@ -117,6 +120,1476 @@
     </a:lvl9pPr>
   </p:defaultTextStyle>
 </p:presentation>
+</file>
+
+<file path=ppt/notesMasters/notesMaster1.xml><?xml version="1.0" encoding="utf-8"?>
+<p:notesMaster xmlns:a="http://schemas.openxmlformats.org/drawingml/2006/main" xmlns:p="http://schemas.openxmlformats.org/presentationml/2006/main" xmlns:r="http://schemas.openxmlformats.org/officeDocument/2006/relationships">
+  <p:cSld>
+    <p:bg>
+      <p:bgRef idx="1001">
+        <a:schemeClr val="bg1"/>
+      </p:bgRef>
+    </p:bg>
+    <p:spTree>
+      <p:nvGrpSpPr>
+        <p:cNvPr id="1" name=""/>
+        <p:cNvGrpSpPr/>
+        <p:nvPr/>
+      </p:nvGrpSpPr>
+      <p:grpSpPr>
+        <a:xfrm>
+          <a:off x="0" y="0"/>
+          <a:ext cx="0" cy="0"/>
+          <a:chOff x="0" y="0"/>
+          <a:chExt cx="0" cy="0"/>
+        </a:xfrm>
+      </p:grpSpPr>
+      <p:sp>
+        <p:nvSpPr>
+          <p:cNvPr id="2" name="Header Placeholder 1"/>
+          <p:cNvSpPr>
+            <a:spLocks noGrp="1"/>
+          </p:cNvSpPr>
+          <p:nvPr>
+            <p:ph type="hdr" sz="quarter"/>
+          </p:nvPr>
+        </p:nvSpPr>
+        <p:spPr>
+          <a:xfrm>
+            <a:off x="0" y="0"/>
+            <a:ext cx="2971800" cy="457200"/>
+          </a:xfrm>
+          <a:prstGeom prst="rect">
+            <a:avLst/>
+          </a:prstGeom>
+        </p:spPr>
+        <p:txBody>
+          <a:bodyPr vert="horz" lIns="91440" tIns="45720" rIns="91440" bIns="45720" rtlCol="0"/>
+          <a:lstStyle>
+            <a:lvl1pPr algn="l">
+              <a:defRPr sz="1200"/>
+            </a:lvl1pPr>
+          </a:lstStyle>
+          <a:p>
+            <a:endParaRPr lang="en-US"/>
+          </a:p>
+        </p:txBody>
+      </p:sp>
+      <p:sp>
+        <p:nvSpPr>
+          <p:cNvPr id="3" name="Date Placeholder 2"/>
+          <p:cNvSpPr>
+            <a:spLocks noGrp="1"/>
+          </p:cNvSpPr>
+          <p:nvPr>
+            <p:ph type="dt" idx="1"/>
+          </p:nvPr>
+        </p:nvSpPr>
+        <p:spPr>
+          <a:xfrm>
+            <a:off x="3884613" y="0"/>
+            <a:ext cx="2971800" cy="457200"/>
+          </a:xfrm>
+          <a:prstGeom prst="rect">
+            <a:avLst/>
+          </a:prstGeom>
+        </p:spPr>
+        <p:txBody>
+          <a:bodyPr vert="horz" lIns="91440" tIns="45720" rIns="91440" bIns="45720" rtlCol="0"/>
+          <a:lstStyle>
+            <a:lvl1pPr algn="r">
+              <a:defRPr sz="1200"/>
+            </a:lvl1pPr>
+          </a:lstStyle>
+          <a:p>
+            <a:fld id="{0F89C1C7-3DCD-1040-A9CF-14679D8B5DDD}" type="datetimeFigureOut">
+              <a:rPr lang="en-US" smtClean="0"/>
+              <a:t>10/17/16</a:t>
+            </a:fld>
+            <a:endParaRPr lang="en-US"/>
+          </a:p>
+        </p:txBody>
+      </p:sp>
+      <p:sp>
+        <p:nvSpPr>
+          <p:cNvPr id="4" name="Slide Image Placeholder 3"/>
+          <p:cNvSpPr>
+            <a:spLocks noGrp="1" noRot="1" noChangeAspect="1"/>
+          </p:cNvSpPr>
+          <p:nvPr>
+            <p:ph type="sldImg" idx="2"/>
+          </p:nvPr>
+        </p:nvSpPr>
+        <p:spPr>
+          <a:xfrm>
+            <a:off x="1143000" y="685800"/>
+            <a:ext cx="4572000" cy="3429000"/>
+          </a:xfrm>
+          <a:prstGeom prst="rect">
+            <a:avLst/>
+          </a:prstGeom>
+          <a:noFill/>
+          <a:ln w="12700">
+            <a:solidFill>
+              <a:prstClr val="black"/>
+            </a:solidFill>
+          </a:ln>
+        </p:spPr>
+        <p:txBody>
+          <a:bodyPr vert="horz" lIns="91440" tIns="45720" rIns="91440" bIns="45720" rtlCol="0" anchor="ctr"/>
+          <a:lstStyle/>
+          <a:p>
+            <a:endParaRPr lang="en-US"/>
+          </a:p>
+        </p:txBody>
+      </p:sp>
+      <p:sp>
+        <p:nvSpPr>
+          <p:cNvPr id="5" name="Notes Placeholder 4"/>
+          <p:cNvSpPr>
+            <a:spLocks noGrp="1"/>
+          </p:cNvSpPr>
+          <p:nvPr>
+            <p:ph type="body" sz="quarter" idx="3"/>
+          </p:nvPr>
+        </p:nvSpPr>
+        <p:spPr>
+          <a:xfrm>
+            <a:off x="685800" y="4343400"/>
+            <a:ext cx="5486400" cy="4114800"/>
+          </a:xfrm>
+          <a:prstGeom prst="rect">
+            <a:avLst/>
+          </a:prstGeom>
+        </p:spPr>
+        <p:txBody>
+          <a:bodyPr vert="horz" lIns="91440" tIns="45720" rIns="91440" bIns="45720" rtlCol="0"/>
+          <a:lstStyle/>
+          <a:p>
+            <a:pPr lvl="0"/>
+            <a:r>
+              <a:rPr lang="en-US" smtClean="0"/>
+              <a:t>Click to edit Master text styles</a:t>
+            </a:r>
+          </a:p>
+          <a:p>
+            <a:pPr lvl="1"/>
+            <a:r>
+              <a:rPr lang="en-US" smtClean="0"/>
+              <a:t>Second level</a:t>
+            </a:r>
+          </a:p>
+          <a:p>
+            <a:pPr lvl="2"/>
+            <a:r>
+              <a:rPr lang="en-US" smtClean="0"/>
+              <a:t>Third level</a:t>
+            </a:r>
+          </a:p>
+          <a:p>
+            <a:pPr lvl="3"/>
+            <a:r>
+              <a:rPr lang="en-US" smtClean="0"/>
+              <a:t>Fourth level</a:t>
+            </a:r>
+          </a:p>
+          <a:p>
+            <a:pPr lvl="4"/>
+            <a:r>
+              <a:rPr lang="en-US" smtClean="0"/>
+              <a:t>Fifth level</a:t>
+            </a:r>
+            <a:endParaRPr lang="en-US"/>
+          </a:p>
+        </p:txBody>
+      </p:sp>
+      <p:sp>
+        <p:nvSpPr>
+          <p:cNvPr id="6" name="Footer Placeholder 5"/>
+          <p:cNvSpPr>
+            <a:spLocks noGrp="1"/>
+          </p:cNvSpPr>
+          <p:nvPr>
+            <p:ph type="ftr" sz="quarter" idx="4"/>
+          </p:nvPr>
+        </p:nvSpPr>
+        <p:spPr>
+          <a:xfrm>
+            <a:off x="0" y="8685213"/>
+            <a:ext cx="2971800" cy="457200"/>
+          </a:xfrm>
+          <a:prstGeom prst="rect">
+            <a:avLst/>
+          </a:prstGeom>
+        </p:spPr>
+        <p:txBody>
+          <a:bodyPr vert="horz" lIns="91440" tIns="45720" rIns="91440" bIns="45720" rtlCol="0" anchor="b"/>
+          <a:lstStyle>
+            <a:lvl1pPr algn="l">
+              <a:defRPr sz="1200"/>
+            </a:lvl1pPr>
+          </a:lstStyle>
+          <a:p>
+            <a:endParaRPr lang="en-US"/>
+          </a:p>
+        </p:txBody>
+      </p:sp>
+      <p:sp>
+        <p:nvSpPr>
+          <p:cNvPr id="7" name="Slide Number Placeholder 6"/>
+          <p:cNvSpPr>
+            <a:spLocks noGrp="1"/>
+          </p:cNvSpPr>
+          <p:nvPr>
+            <p:ph type="sldNum" sz="quarter" idx="5"/>
+          </p:nvPr>
+        </p:nvSpPr>
+        <p:spPr>
+          <a:xfrm>
+            <a:off x="3884613" y="8685213"/>
+            <a:ext cx="2971800" cy="457200"/>
+          </a:xfrm>
+          <a:prstGeom prst="rect">
+            <a:avLst/>
+          </a:prstGeom>
+        </p:spPr>
+        <p:txBody>
+          <a:bodyPr vert="horz" lIns="91440" tIns="45720" rIns="91440" bIns="45720" rtlCol="0" anchor="b"/>
+          <a:lstStyle>
+            <a:lvl1pPr algn="r">
+              <a:defRPr sz="1200"/>
+            </a:lvl1pPr>
+          </a:lstStyle>
+          <a:p>
+            <a:fld id="{BB5E49A5-4136-284D-997B-48E1D791AD67}" type="slidenum">
+              <a:rPr lang="en-US" smtClean="0"/>
+              <a:t>‹#›</a:t>
+            </a:fld>
+            <a:endParaRPr lang="en-US"/>
+          </a:p>
+        </p:txBody>
+      </p:sp>
+    </p:spTree>
+    <p:extLst>
+      <p:ext uri="{BB962C8B-B14F-4D97-AF65-F5344CB8AC3E}">
+        <p14:creationId xmlns:p14="http://schemas.microsoft.com/office/powerpoint/2010/main" val="2623252185"/>
+      </p:ext>
+    </p:extLst>
+  </p:cSld>
+  <p:clrMap bg1="lt1" tx1="dk1" bg2="lt2" tx2="dk2" accent1="accent1" accent2="accent2" accent3="accent3" accent4="accent4" accent5="accent5" accent6="accent6" hlink="hlink" folHlink="folHlink"/>
+  <p:notesStyle>
+    <a:lvl1pPr marL="0" algn="l" defTabSz="457200" rtl="0" eaLnBrk="1" latinLnBrk="0" hangingPunct="1">
+      <a:defRPr sz="1200" kern="1200">
+        <a:solidFill>
+          <a:schemeClr val="tx1"/>
+        </a:solidFill>
+        <a:latin typeface="+mn-lt"/>
+        <a:ea typeface="+mn-ea"/>
+        <a:cs typeface="+mn-cs"/>
+      </a:defRPr>
+    </a:lvl1pPr>
+    <a:lvl2pPr marL="457200" algn="l" defTabSz="457200" rtl="0" eaLnBrk="1" latinLnBrk="0" hangingPunct="1">
+      <a:defRPr sz="1200" kern="1200">
+        <a:solidFill>
+          <a:schemeClr val="tx1"/>
+        </a:solidFill>
+        <a:latin typeface="+mn-lt"/>
+        <a:ea typeface="+mn-ea"/>
+        <a:cs typeface="+mn-cs"/>
+      </a:defRPr>
+    </a:lvl2pPr>
+    <a:lvl3pPr marL="914400" algn="l" defTabSz="457200" rtl="0" eaLnBrk="1" latinLnBrk="0" hangingPunct="1">
+      <a:defRPr sz="1200" kern="1200">
+        <a:solidFill>
+          <a:schemeClr val="tx1"/>
+        </a:solidFill>
+        <a:latin typeface="+mn-lt"/>
+        <a:ea typeface="+mn-ea"/>
+        <a:cs typeface="+mn-cs"/>
+      </a:defRPr>
+    </a:lvl3pPr>
+    <a:lvl4pPr marL="1371600" algn="l" defTabSz="457200" rtl="0" eaLnBrk="1" latinLnBrk="0" hangingPunct="1">
+      <a:defRPr sz="1200" kern="1200">
+        <a:solidFill>
+          <a:schemeClr val="tx1"/>
+        </a:solidFill>
+        <a:latin typeface="+mn-lt"/>
+        <a:ea typeface="+mn-ea"/>
+        <a:cs typeface="+mn-cs"/>
+      </a:defRPr>
+    </a:lvl4pPr>
+    <a:lvl5pPr marL="1828800" algn="l" defTabSz="457200" rtl="0" eaLnBrk="1" latinLnBrk="0" hangingPunct="1">
+      <a:defRPr sz="1200" kern="1200">
+        <a:solidFill>
+          <a:schemeClr val="tx1"/>
+        </a:solidFill>
+        <a:latin typeface="+mn-lt"/>
+        <a:ea typeface="+mn-ea"/>
+        <a:cs typeface="+mn-cs"/>
+      </a:defRPr>
+    </a:lvl5pPr>
+    <a:lvl6pPr marL="2286000" algn="l" defTabSz="457200" rtl="0" eaLnBrk="1" latinLnBrk="0" hangingPunct="1">
+      <a:defRPr sz="1200" kern="1200">
+        <a:solidFill>
+          <a:schemeClr val="tx1"/>
+        </a:solidFill>
+        <a:latin typeface="+mn-lt"/>
+        <a:ea typeface="+mn-ea"/>
+        <a:cs typeface="+mn-cs"/>
+      </a:defRPr>
+    </a:lvl6pPr>
+    <a:lvl7pPr marL="2743200" algn="l" defTabSz="457200" rtl="0" eaLnBrk="1" latinLnBrk="0" hangingPunct="1">
+      <a:defRPr sz="1200" kern="1200">
+        <a:solidFill>
+          <a:schemeClr val="tx1"/>
+        </a:solidFill>
+        <a:latin typeface="+mn-lt"/>
+        <a:ea typeface="+mn-ea"/>
+        <a:cs typeface="+mn-cs"/>
+      </a:defRPr>
+    </a:lvl7pPr>
+    <a:lvl8pPr marL="3200400" algn="l" defTabSz="457200" rtl="0" eaLnBrk="1" latinLnBrk="0" hangingPunct="1">
+      <a:defRPr sz="1200" kern="1200">
+        <a:solidFill>
+          <a:schemeClr val="tx1"/>
+        </a:solidFill>
+        <a:latin typeface="+mn-lt"/>
+        <a:ea typeface="+mn-ea"/>
+        <a:cs typeface="+mn-cs"/>
+      </a:defRPr>
+    </a:lvl8pPr>
+    <a:lvl9pPr marL="3657600" algn="l" defTabSz="457200" rtl="0" eaLnBrk="1" latinLnBrk="0" hangingPunct="1">
+      <a:defRPr sz="1200" kern="1200">
+        <a:solidFill>
+          <a:schemeClr val="tx1"/>
+        </a:solidFill>
+        <a:latin typeface="+mn-lt"/>
+        <a:ea typeface="+mn-ea"/>
+        <a:cs typeface="+mn-cs"/>
+      </a:defRPr>
+    </a:lvl9pPr>
+  </p:notesStyle>
+</p:notesMaster>
+</file>
+
+<file path=ppt/notesSlides/notesSlide1.xml><?xml version="1.0" encoding="utf-8"?>
+<p:notes xmlns:a="http://schemas.openxmlformats.org/drawingml/2006/main" xmlns:p="http://schemas.openxmlformats.org/presentationml/2006/main" xmlns:r="http://schemas.openxmlformats.org/officeDocument/2006/relationships">
+  <p:cSld>
+    <p:spTree>
+      <p:nvGrpSpPr>
+        <p:cNvPr id="1" name=""/>
+        <p:cNvGrpSpPr/>
+        <p:nvPr/>
+      </p:nvGrpSpPr>
+      <p:grpSpPr>
+        <a:xfrm>
+          <a:off x="0" y="0"/>
+          <a:ext cx="0" cy="0"/>
+          <a:chOff x="0" y="0"/>
+          <a:chExt cx="0" cy="0"/>
+        </a:xfrm>
+      </p:grpSpPr>
+      <p:sp>
+        <p:nvSpPr>
+          <p:cNvPr id="2" name="Slide Image Placeholder 1"/>
+          <p:cNvSpPr>
+            <a:spLocks noGrp="1"/>
+          </p:cNvSpPr>
+          <p:nvPr>
+            <p:ph type="sldImg" idx="2"/>
+          </p:nvPr>
+        </p:nvSpPr>
+        <p:spPr/>
+      </p:sp>
+      <p:sp>
+        <p:nvSpPr>
+          <p:cNvPr id="3" name="Notes Placeholder 2"/>
+          <p:cNvSpPr>
+            <a:spLocks noGrp="1"/>
+          </p:cNvSpPr>
+          <p:nvPr>
+            <p:ph type="body" idx="3" sz="quarter"/>
+          </p:nvPr>
+        </p:nvSpPr>
+        <p:spPr/>
+        <p:txBody>
+          <a:bodyPr/>
+          <a:lstStyle/>
+          <a:p>
+            <a:r>
+              <a:t>One-line pitch: admissions lost its standardized school-context tool, and we rebuilt one from public data that anyone can audit.</a:t>
+            </a:r>
+          </a:p>
+        </p:txBody>
+      </p:sp>
+      <p:sp>
+        <p:nvSpPr>
+          <p:cNvPr id="4" name="Slide Number Placeholder 3"/>
+          <p:cNvSpPr>
+            <a:spLocks noGrp="1"/>
+          </p:cNvSpPr>
+          <p:nvPr>
+            <p:ph type="sldNum" idx="5" sz="quarter"/>
+          </p:nvPr>
+        </p:nvSpPr>
+        <p:spPr/>
+      </p:sp>
+    </p:spTree>
+  </p:cSld>
+  <p:clrMapOvr>
+    <a:masterClrMapping/>
+  </p:clrMapOvr>
+</p:notes>
+</file>
+
+<file path=ppt/notesSlides/notesSlide10.xml><?xml version="1.0" encoding="utf-8"?>
+<p:notes xmlns:a="http://schemas.openxmlformats.org/drawingml/2006/main" xmlns:p="http://schemas.openxmlformats.org/presentationml/2006/main" xmlns:r="http://schemas.openxmlformats.org/officeDocument/2006/relationships">
+  <p:cSld>
+    <p:spTree>
+      <p:nvGrpSpPr>
+        <p:cNvPr id="1" name=""/>
+        <p:cNvGrpSpPr/>
+        <p:nvPr/>
+      </p:nvGrpSpPr>
+      <p:grpSpPr>
+        <a:xfrm>
+          <a:off x="0" y="0"/>
+          <a:ext cx="0" cy="0"/>
+          <a:chOff x="0" y="0"/>
+          <a:chExt cx="0" cy="0"/>
+        </a:xfrm>
+      </p:grpSpPr>
+      <p:sp>
+        <p:nvSpPr>
+          <p:cNvPr id="2" name="Slide Image Placeholder 1"/>
+          <p:cNvSpPr>
+            <a:spLocks noGrp="1"/>
+          </p:cNvSpPr>
+          <p:nvPr>
+            <p:ph type="sldImg" idx="2"/>
+          </p:nvPr>
+        </p:nvSpPr>
+        <p:spPr/>
+      </p:sp>
+      <p:sp>
+        <p:nvSpPr>
+          <p:cNvPr id="3" name="Notes Placeholder 2"/>
+          <p:cNvSpPr>
+            <a:spLocks noGrp="1"/>
+          </p:cNvSpPr>
+          <p:nvPr>
+            <p:ph type="body" idx="3" sz="quarter"/>
+          </p:nvPr>
+        </p:nvSpPr>
+        <p:spPr/>
+        <p:txBody>
+          <a:bodyPr/>
+          <a:lstStyle/>
+          <a:p>
+            <a:r>
+              <a:t>Strongest empirical result in the deck. Monotonic across all five tiers on a measure the index never touched.</a:t>
+            </a:r>
+          </a:p>
+        </p:txBody>
+      </p:sp>
+      <p:sp>
+        <p:nvSpPr>
+          <p:cNvPr id="4" name="Slide Number Placeholder 3"/>
+          <p:cNvSpPr>
+            <a:spLocks noGrp="1"/>
+          </p:cNvSpPr>
+          <p:nvPr>
+            <p:ph type="sldNum" idx="5" sz="quarter"/>
+          </p:nvPr>
+        </p:nvSpPr>
+        <p:spPr/>
+      </p:sp>
+    </p:spTree>
+  </p:cSld>
+  <p:clrMapOvr>
+    <a:masterClrMapping/>
+  </p:clrMapOvr>
+</p:notes>
+</file>
+
+<file path=ppt/notesSlides/notesSlide11.xml><?xml version="1.0" encoding="utf-8"?>
+<p:notes xmlns:a="http://schemas.openxmlformats.org/drawingml/2006/main" xmlns:p="http://schemas.openxmlformats.org/presentationml/2006/main" xmlns:r="http://schemas.openxmlformats.org/officeDocument/2006/relationships">
+  <p:cSld>
+    <p:spTree>
+      <p:nvGrpSpPr>
+        <p:cNvPr id="1" name=""/>
+        <p:cNvGrpSpPr/>
+        <p:nvPr/>
+      </p:nvGrpSpPr>
+      <p:grpSpPr>
+        <a:xfrm>
+          <a:off x="0" y="0"/>
+          <a:ext cx="0" cy="0"/>
+          <a:chOff x="0" y="0"/>
+          <a:chExt cx="0" cy="0"/>
+        </a:xfrm>
+      </p:grpSpPr>
+      <p:sp>
+        <p:nvSpPr>
+          <p:cNvPr id="2" name="Slide Image Placeholder 1"/>
+          <p:cNvSpPr>
+            <a:spLocks noGrp="1"/>
+          </p:cNvSpPr>
+          <p:nvPr>
+            <p:ph type="sldImg" idx="2"/>
+          </p:nvPr>
+        </p:nvSpPr>
+        <p:spPr/>
+      </p:sp>
+      <p:sp>
+        <p:nvSpPr>
+          <p:cNvPr id="3" name="Notes Placeholder 2"/>
+          <p:cNvSpPr>
+            <a:spLocks noGrp="1"/>
+          </p:cNvSpPr>
+          <p:nvPr>
+            <p:ph type="body" idx="3" sz="quarter"/>
+          </p:nvPr>
+        </p:nvSpPr>
+        <p:spPr/>
+        <p:txBody>
+          <a:bodyPr/>
+          <a:lstStyle/>
+          <a:p>
+            <a:r>
+              <a:t>This slide converts a literature argument into our own evidence. If you only keep one methods-defense slide, keep this one.</a:t>
+            </a:r>
+          </a:p>
+        </p:txBody>
+      </p:sp>
+      <p:sp>
+        <p:nvSpPr>
+          <p:cNvPr id="4" name="Slide Number Placeholder 3"/>
+          <p:cNvSpPr>
+            <a:spLocks noGrp="1"/>
+          </p:cNvSpPr>
+          <p:nvPr>
+            <p:ph type="sldNum" idx="5" sz="quarter"/>
+          </p:nvPr>
+        </p:nvSpPr>
+        <p:spPr/>
+      </p:sp>
+    </p:spTree>
+  </p:cSld>
+  <p:clrMapOvr>
+    <a:masterClrMapping/>
+  </p:clrMapOvr>
+</p:notes>
+</file>
+
+<file path=ppt/notesSlides/notesSlide12.xml><?xml version="1.0" encoding="utf-8"?>
+<p:notes xmlns:a="http://schemas.openxmlformats.org/drawingml/2006/main" xmlns:p="http://schemas.openxmlformats.org/presentationml/2006/main" xmlns:r="http://schemas.openxmlformats.org/officeDocument/2006/relationships">
+  <p:cSld>
+    <p:spTree>
+      <p:nvGrpSpPr>
+        <p:cNvPr id="1" name=""/>
+        <p:cNvGrpSpPr/>
+        <p:nvPr/>
+      </p:nvGrpSpPr>
+      <p:grpSpPr>
+        <a:xfrm>
+          <a:off x="0" y="0"/>
+          <a:ext cx="0" cy="0"/>
+          <a:chOff x="0" y="0"/>
+          <a:chExt cx="0" cy="0"/>
+        </a:xfrm>
+      </p:grpSpPr>
+      <p:sp>
+        <p:nvSpPr>
+          <p:cNvPr id="2" name="Slide Image Placeholder 1"/>
+          <p:cNvSpPr>
+            <a:spLocks noGrp="1"/>
+          </p:cNvSpPr>
+          <p:nvPr>
+            <p:ph type="sldImg" idx="2"/>
+          </p:nvPr>
+        </p:nvSpPr>
+        <p:spPr/>
+      </p:sp>
+      <p:sp>
+        <p:nvSpPr>
+          <p:cNvPr id="3" name="Notes Placeholder 2"/>
+          <p:cNvSpPr>
+            <a:spLocks noGrp="1"/>
+          </p:cNvSpPr>
+          <p:nvPr>
+            <p:ph type="body" idx="3" sz="quarter"/>
+          </p:nvPr>
+        </p:nvSpPr>
+        <p:spPr/>
+        <p:txBody>
+          <a:bodyPr/>
+          <a:lstStyle/>
+          <a:p>
+            <a:r>
+              <a:t>Emphasise that this model validates the index; it is not the deliverable. Predicting graduation is how we test that the construct carries signal.</a:t>
+            </a:r>
+          </a:p>
+        </p:txBody>
+      </p:sp>
+      <p:sp>
+        <p:nvSpPr>
+          <p:cNvPr id="4" name="Slide Number Placeholder 3"/>
+          <p:cNvSpPr>
+            <a:spLocks noGrp="1"/>
+          </p:cNvSpPr>
+          <p:nvPr>
+            <p:ph type="sldNum" idx="5" sz="quarter"/>
+          </p:nvPr>
+        </p:nvSpPr>
+        <p:spPr/>
+      </p:sp>
+    </p:spTree>
+  </p:cSld>
+  <p:clrMapOvr>
+    <a:masterClrMapping/>
+  </p:clrMapOvr>
+</p:notes>
+</file>
+
+<file path=ppt/notesSlides/notesSlide13.xml><?xml version="1.0" encoding="utf-8"?>
+<p:notes xmlns:a="http://schemas.openxmlformats.org/drawingml/2006/main" xmlns:p="http://schemas.openxmlformats.org/presentationml/2006/main" xmlns:r="http://schemas.openxmlformats.org/officeDocument/2006/relationships">
+  <p:cSld>
+    <p:spTree>
+      <p:nvGrpSpPr>
+        <p:cNvPr id="1" name=""/>
+        <p:cNvGrpSpPr/>
+        <p:nvPr/>
+      </p:nvGrpSpPr>
+      <p:grpSpPr>
+        <a:xfrm>
+          <a:off x="0" y="0"/>
+          <a:ext cx="0" cy="0"/>
+          <a:chOff x="0" y="0"/>
+          <a:chExt cx="0" cy="0"/>
+        </a:xfrm>
+      </p:grpSpPr>
+      <p:sp>
+        <p:nvSpPr>
+          <p:cNvPr id="2" name="Slide Image Placeholder 1"/>
+          <p:cNvSpPr>
+            <a:spLocks noGrp="1"/>
+          </p:cNvSpPr>
+          <p:nvPr>
+            <p:ph type="sldImg" idx="2"/>
+          </p:nvPr>
+        </p:nvSpPr>
+        <p:spPr/>
+      </p:sp>
+      <p:sp>
+        <p:nvSpPr>
+          <p:cNvPr id="3" name="Notes Placeholder 2"/>
+          <p:cNvSpPr>
+            <a:spLocks noGrp="1"/>
+          </p:cNvSpPr>
+          <p:nvPr>
+            <p:ph type="body" idx="3" sz="quarter"/>
+          </p:nvPr>
+        </p:nvSpPr>
+        <p:spPr/>
+        <p:txBody>
+          <a:bodyPr/>
+          <a:lstStyle/>
+          <a:p>
+            <a:r>
+              <a:t>Expect 'why not just cluster to get the tiers?'. Because clustering gives unordered groups, and rigor is inherently ordinal -- plus no ground truth to name the order.</a:t>
+            </a:r>
+          </a:p>
+        </p:txBody>
+      </p:sp>
+      <p:sp>
+        <p:nvSpPr>
+          <p:cNvPr id="4" name="Slide Number Placeholder 3"/>
+          <p:cNvSpPr>
+            <a:spLocks noGrp="1"/>
+          </p:cNvSpPr>
+          <p:nvPr>
+            <p:ph type="sldNum" idx="5" sz="quarter"/>
+          </p:nvPr>
+        </p:nvSpPr>
+        <p:spPr/>
+      </p:sp>
+    </p:spTree>
+  </p:cSld>
+  <p:clrMapOvr>
+    <a:masterClrMapping/>
+  </p:clrMapOvr>
+</p:notes>
+</file>
+
+<file path=ppt/notesSlides/notesSlide14.xml><?xml version="1.0" encoding="utf-8"?>
+<p:notes xmlns:a="http://schemas.openxmlformats.org/drawingml/2006/main" xmlns:p="http://schemas.openxmlformats.org/presentationml/2006/main" xmlns:r="http://schemas.openxmlformats.org/officeDocument/2006/relationships">
+  <p:cSld>
+    <p:spTree>
+      <p:nvGrpSpPr>
+        <p:cNvPr id="1" name=""/>
+        <p:cNvGrpSpPr/>
+        <p:nvPr/>
+      </p:nvGrpSpPr>
+      <p:grpSpPr>
+        <a:xfrm>
+          <a:off x="0" y="0"/>
+          <a:ext cx="0" cy="0"/>
+          <a:chOff x="0" y="0"/>
+          <a:chExt cx="0" cy="0"/>
+        </a:xfrm>
+      </p:grpSpPr>
+      <p:sp>
+        <p:nvSpPr>
+          <p:cNvPr id="2" name="Slide Image Placeholder 1"/>
+          <p:cNvSpPr>
+            <a:spLocks noGrp="1"/>
+          </p:cNvSpPr>
+          <p:nvPr>
+            <p:ph type="sldImg" idx="2"/>
+          </p:nvPr>
+        </p:nvSpPr>
+        <p:spPr/>
+      </p:sp>
+      <p:sp>
+        <p:nvSpPr>
+          <p:cNvPr id="3" name="Notes Placeholder 2"/>
+          <p:cNvSpPr>
+            <a:spLocks noGrp="1"/>
+          </p:cNvSpPr>
+          <p:nvPr>
+            <p:ph type="body" idx="3" sz="quarter"/>
+          </p:nvPr>
+        </p:nvSpPr>
+        <p:spPr/>
+        <p:txBody>
+          <a:bodyPr/>
+          <a:lstStyle/>
+          <a:p>
+            <a:r>
+              <a:t>This is the 'where is the model?' answer. Three layers, each doing a job the others cannot. The absence of a ground-truth label is the reason for the architecture.</a:t>
+            </a:r>
+          </a:p>
+        </p:txBody>
+      </p:sp>
+      <p:sp>
+        <p:nvSpPr>
+          <p:cNvPr id="4" name="Slide Number Placeholder 3"/>
+          <p:cNvSpPr>
+            <a:spLocks noGrp="1"/>
+          </p:cNvSpPr>
+          <p:nvPr>
+            <p:ph type="sldNum" idx="5" sz="quarter"/>
+          </p:nvPr>
+        </p:nvSpPr>
+        <p:spPr/>
+      </p:sp>
+    </p:spTree>
+  </p:cSld>
+  <p:clrMapOvr>
+    <a:masterClrMapping/>
+  </p:clrMapOvr>
+</p:notes>
+</file>
+
+<file path=ppt/notesSlides/notesSlide15.xml><?xml version="1.0" encoding="utf-8"?>
+<p:notes xmlns:a="http://schemas.openxmlformats.org/drawingml/2006/main" xmlns:p="http://schemas.openxmlformats.org/presentationml/2006/main" xmlns:r="http://schemas.openxmlformats.org/officeDocument/2006/relationships">
+  <p:cSld>
+    <p:spTree>
+      <p:nvGrpSpPr>
+        <p:cNvPr id="1" name=""/>
+        <p:cNvGrpSpPr/>
+        <p:nvPr/>
+      </p:nvGrpSpPr>
+      <p:grpSpPr>
+        <a:xfrm>
+          <a:off x="0" y="0"/>
+          <a:ext cx="0" cy="0"/>
+          <a:chOff x="0" y="0"/>
+          <a:chExt cx="0" cy="0"/>
+        </a:xfrm>
+      </p:grpSpPr>
+      <p:sp>
+        <p:nvSpPr>
+          <p:cNvPr id="2" name="Slide Image Placeholder 1"/>
+          <p:cNvSpPr>
+            <a:spLocks noGrp="1"/>
+          </p:cNvSpPr>
+          <p:nvPr>
+            <p:ph type="sldImg" idx="2"/>
+          </p:nvPr>
+        </p:nvSpPr>
+        <p:spPr/>
+      </p:sp>
+      <p:sp>
+        <p:nvSpPr>
+          <p:cNvPr id="3" name="Notes Placeholder 2"/>
+          <p:cNvSpPr>
+            <a:spLocks noGrp="1"/>
+          </p:cNvSpPr>
+          <p:nvPr>
+            <p:ph type="body" idx="3" sz="quarter"/>
+          </p:nvPr>
+        </p:nvSpPr>
+        <p:spPr/>
+        <p:txBody>
+          <a:bodyPr/>
+          <a:lstStyle/>
+          <a:p>
+            <a:r>
+              <a:t>Volunteering limitations is what buys credibility on the rest. Each one maps to an extension point in the NU handoff rather than a dead end.</a:t>
+            </a:r>
+          </a:p>
+        </p:txBody>
+      </p:sp>
+      <p:sp>
+        <p:nvSpPr>
+          <p:cNvPr id="4" name="Slide Number Placeholder 3"/>
+          <p:cNvSpPr>
+            <a:spLocks noGrp="1"/>
+          </p:cNvSpPr>
+          <p:nvPr>
+            <p:ph type="sldNum" idx="5" sz="quarter"/>
+          </p:nvPr>
+        </p:nvSpPr>
+        <p:spPr/>
+      </p:sp>
+    </p:spTree>
+  </p:cSld>
+  <p:clrMapOvr>
+    <a:masterClrMapping/>
+  </p:clrMapOvr>
+</p:notes>
+</file>
+
+<file path=ppt/notesSlides/notesSlide16.xml><?xml version="1.0" encoding="utf-8"?>
+<p:notes xmlns:a="http://schemas.openxmlformats.org/drawingml/2006/main" xmlns:p="http://schemas.openxmlformats.org/presentationml/2006/main" xmlns:r="http://schemas.openxmlformats.org/officeDocument/2006/relationships">
+  <p:cSld>
+    <p:spTree>
+      <p:nvGrpSpPr>
+        <p:cNvPr id="1" name=""/>
+        <p:cNvGrpSpPr/>
+        <p:nvPr/>
+      </p:nvGrpSpPr>
+      <p:grpSpPr>
+        <a:xfrm>
+          <a:off x="0" y="0"/>
+          <a:ext cx="0" cy="0"/>
+          <a:chOff x="0" y="0"/>
+          <a:chExt cx="0" cy="0"/>
+        </a:xfrm>
+      </p:grpSpPr>
+      <p:sp>
+        <p:nvSpPr>
+          <p:cNvPr id="2" name="Slide Image Placeholder 1"/>
+          <p:cNvSpPr>
+            <a:spLocks noGrp="1"/>
+          </p:cNvSpPr>
+          <p:nvPr>
+            <p:ph type="sldImg" idx="2"/>
+          </p:nvPr>
+        </p:nvSpPr>
+        <p:spPr/>
+      </p:sp>
+      <p:sp>
+        <p:nvSpPr>
+          <p:cNvPr id="3" name="Notes Placeholder 2"/>
+          <p:cNvSpPr>
+            <a:spLocks noGrp="1"/>
+          </p:cNvSpPr>
+          <p:nvPr>
+            <p:ph type="body" idx="3" sz="quarter"/>
+          </p:nvPr>
+        </p:nvSpPr>
+        <p:spPr/>
+        <p:txBody>
+          <a:bodyPr/>
+          <a:lstStyle/>
+          <a:p>
+            <a:r>
+              <a:t>Close on the handoff. The measure is built to be recalibrated against NU's internal outcomes, which is the natural continuation of the work.</a:t>
+            </a:r>
+          </a:p>
+        </p:txBody>
+      </p:sp>
+      <p:sp>
+        <p:nvSpPr>
+          <p:cNvPr id="4" name="Slide Number Placeholder 3"/>
+          <p:cNvSpPr>
+            <a:spLocks noGrp="1"/>
+          </p:cNvSpPr>
+          <p:nvPr>
+            <p:ph type="sldNum" idx="5" sz="quarter"/>
+          </p:nvPr>
+        </p:nvSpPr>
+        <p:spPr/>
+      </p:sp>
+    </p:spTree>
+  </p:cSld>
+  <p:clrMapOvr>
+    <a:masterClrMapping/>
+  </p:clrMapOvr>
+</p:notes>
+</file>
+
+<file path=ppt/notesSlides/notesSlide2.xml><?xml version="1.0" encoding="utf-8"?>
+<p:notes xmlns:a="http://schemas.openxmlformats.org/drawingml/2006/main" xmlns:p="http://schemas.openxmlformats.org/presentationml/2006/main" xmlns:r="http://schemas.openxmlformats.org/officeDocument/2006/relationships">
+  <p:cSld>
+    <p:spTree>
+      <p:nvGrpSpPr>
+        <p:cNvPr id="1" name=""/>
+        <p:cNvGrpSpPr/>
+        <p:nvPr/>
+      </p:nvGrpSpPr>
+      <p:grpSpPr>
+        <a:xfrm>
+          <a:off x="0" y="0"/>
+          <a:ext cx="0" cy="0"/>
+          <a:chOff x="0" y="0"/>
+          <a:chExt cx="0" cy="0"/>
+        </a:xfrm>
+      </p:grpSpPr>
+      <p:sp>
+        <p:nvSpPr>
+          <p:cNvPr id="2" name="Slide Image Placeholder 1"/>
+          <p:cNvSpPr>
+            <a:spLocks noGrp="1"/>
+          </p:cNvSpPr>
+          <p:nvPr>
+            <p:ph type="sldImg" idx="2"/>
+          </p:nvPr>
+        </p:nvSpPr>
+        <p:spPr/>
+      </p:sp>
+      <p:sp>
+        <p:nvSpPr>
+          <p:cNvPr id="3" name="Notes Placeholder 2"/>
+          <p:cNvSpPr>
+            <a:spLocks noGrp="1"/>
+          </p:cNvSpPr>
+          <p:nvPr>
+            <p:ph type="body" idx="3" sz="quarter"/>
+          </p:nvPr>
+        </p:nvSpPr>
+        <p:spPr/>
+        <p:txBody>
+          <a:bodyPr/>
+          <a:lstStyle/>
+          <a:p>
+            <a:r>
+              <a:t>Be precise here: we measure schools, not students, and there is no admissions outcome in this data. The student-level version is the handoff, not this project.</a:t>
+            </a:r>
+          </a:p>
+        </p:txBody>
+      </p:sp>
+      <p:sp>
+        <p:nvSpPr>
+          <p:cNvPr id="4" name="Slide Number Placeholder 3"/>
+          <p:cNvSpPr>
+            <a:spLocks noGrp="1"/>
+          </p:cNvSpPr>
+          <p:nvPr>
+            <p:ph type="sldNum" idx="5" sz="quarter"/>
+          </p:nvPr>
+        </p:nvSpPr>
+        <p:spPr/>
+      </p:sp>
+    </p:spTree>
+  </p:cSld>
+  <p:clrMapOvr>
+    <a:masterClrMapping/>
+  </p:clrMapOvr>
+</p:notes>
+</file>
+
+<file path=ppt/notesSlides/notesSlide3.xml><?xml version="1.0" encoding="utf-8"?>
+<p:notes xmlns:a="http://schemas.openxmlformats.org/drawingml/2006/main" xmlns:p="http://schemas.openxmlformats.org/presentationml/2006/main" xmlns:r="http://schemas.openxmlformats.org/officeDocument/2006/relationships">
+  <p:cSld>
+    <p:spTree>
+      <p:nvGrpSpPr>
+        <p:cNvPr id="1" name=""/>
+        <p:cNvGrpSpPr/>
+        <p:nvPr/>
+      </p:nvGrpSpPr>
+      <p:grpSpPr>
+        <a:xfrm>
+          <a:off x="0" y="0"/>
+          <a:ext cx="0" cy="0"/>
+          <a:chOff x="0" y="0"/>
+          <a:chExt cx="0" cy="0"/>
+        </a:xfrm>
+      </p:grpSpPr>
+      <p:sp>
+        <p:nvSpPr>
+          <p:cNvPr id="2" name="Slide Image Placeholder 1"/>
+          <p:cNvSpPr>
+            <a:spLocks noGrp="1"/>
+          </p:cNvSpPr>
+          <p:nvPr>
+            <p:ph type="sldImg" idx="2"/>
+          </p:nvPr>
+        </p:nvSpPr>
+        <p:spPr/>
+      </p:sp>
+      <p:sp>
+        <p:nvSpPr>
+          <p:cNvPr id="3" name="Notes Placeholder 2"/>
+          <p:cNvSpPr>
+            <a:spLocks noGrp="1"/>
+          </p:cNvSpPr>
+          <p:nvPr>
+            <p:ph type="body" idx="3" sz="quarter"/>
+          </p:nvPr>
+        </p:nvSpPr>
+        <p:spPr/>
+        <p:txBody>
+          <a:bodyPr/>
+          <a:lstStyle/>
+          <a:p>
+            <a:r>
+              <a:t>The pipeline is a deliverable in its own right -- the client can re-run it when new CRDC or NCES vintages land.</a:t>
+            </a:r>
+          </a:p>
+        </p:txBody>
+      </p:sp>
+      <p:sp>
+        <p:nvSpPr>
+          <p:cNvPr id="4" name="Slide Number Placeholder 3"/>
+          <p:cNvSpPr>
+            <a:spLocks noGrp="1"/>
+          </p:cNvSpPr>
+          <p:nvPr>
+            <p:ph type="sldNum" idx="5" sz="quarter"/>
+          </p:nvPr>
+        </p:nvSpPr>
+        <p:spPr/>
+      </p:sp>
+    </p:spTree>
+  </p:cSld>
+  <p:clrMapOvr>
+    <a:masterClrMapping/>
+  </p:clrMapOvr>
+</p:notes>
+</file>
+
+<file path=ppt/notesSlides/notesSlide4.xml><?xml version="1.0" encoding="utf-8"?>
+<p:notes xmlns:a="http://schemas.openxmlformats.org/drawingml/2006/main" xmlns:p="http://schemas.openxmlformats.org/presentationml/2006/main" xmlns:r="http://schemas.openxmlformats.org/officeDocument/2006/relationships">
+  <p:cSld>
+    <p:spTree>
+      <p:nvGrpSpPr>
+        <p:cNvPr id="1" name=""/>
+        <p:cNvGrpSpPr/>
+        <p:nvPr/>
+      </p:nvGrpSpPr>
+      <p:grpSpPr>
+        <a:xfrm>
+          <a:off x="0" y="0"/>
+          <a:ext cx="0" cy="0"/>
+          <a:chOff x="0" y="0"/>
+          <a:chExt cx="0" cy="0"/>
+        </a:xfrm>
+      </p:grpSpPr>
+      <p:sp>
+        <p:nvSpPr>
+          <p:cNvPr id="2" name="Slide Image Placeholder 1"/>
+          <p:cNvSpPr>
+            <a:spLocks noGrp="1"/>
+          </p:cNvSpPr>
+          <p:nvPr>
+            <p:ph type="sldImg" idx="2"/>
+          </p:nvPr>
+        </p:nvSpPr>
+        <p:spPr/>
+      </p:sp>
+      <p:sp>
+        <p:nvSpPr>
+          <p:cNvPr id="3" name="Notes Placeholder 2"/>
+          <p:cNvSpPr>
+            <a:spLocks noGrp="1"/>
+          </p:cNvSpPr>
+          <p:nvPr>
+            <p:ph type="body" idx="3" sz="quarter"/>
+          </p:nvPr>
+        </p:nvSpPr>
+        <p:spPr/>
+        <p:txBody>
+          <a:bodyPr/>
+          <a:lstStyle/>
+          <a:p>
+            <a:r>
+              <a:t>Classic entity-resolution problem. The three-way decision rule matters because forcing a binary match/no-match would quietly inject false links into everything downstream.</a:t>
+            </a:r>
+          </a:p>
+        </p:txBody>
+      </p:sp>
+      <p:sp>
+        <p:nvSpPr>
+          <p:cNvPr id="4" name="Slide Number Placeholder 3"/>
+          <p:cNvSpPr>
+            <a:spLocks noGrp="1"/>
+          </p:cNvSpPr>
+          <p:nvPr>
+            <p:ph type="sldNum" idx="5" sz="quarter"/>
+          </p:nvPr>
+        </p:nvSpPr>
+        <p:spPr/>
+      </p:sp>
+    </p:spTree>
+  </p:cSld>
+  <p:clrMapOvr>
+    <a:masterClrMapping/>
+  </p:clrMapOvr>
+</p:notes>
+</file>
+
+<file path=ppt/notesSlides/notesSlide5.xml><?xml version="1.0" encoding="utf-8"?>
+<p:notes xmlns:a="http://schemas.openxmlformats.org/drawingml/2006/main" xmlns:p="http://schemas.openxmlformats.org/presentationml/2006/main" xmlns:r="http://schemas.openxmlformats.org/officeDocument/2006/relationships">
+  <p:cSld>
+    <p:spTree>
+      <p:nvGrpSpPr>
+        <p:cNvPr id="1" name=""/>
+        <p:cNvGrpSpPr/>
+        <p:nvPr/>
+      </p:nvGrpSpPr>
+      <p:grpSpPr>
+        <a:xfrm>
+          <a:off x="0" y="0"/>
+          <a:ext cx="0" cy="0"/>
+          <a:chOff x="0" y="0"/>
+          <a:chExt cx="0" cy="0"/>
+        </a:xfrm>
+      </p:grpSpPr>
+      <p:sp>
+        <p:nvSpPr>
+          <p:cNvPr id="2" name="Slide Image Placeholder 1"/>
+          <p:cNvSpPr>
+            <a:spLocks noGrp="1"/>
+          </p:cNvSpPr>
+          <p:nvPr>
+            <p:ph type="sldImg" idx="2"/>
+          </p:nvPr>
+        </p:nvSpPr>
+        <p:spPr/>
+      </p:sp>
+      <p:sp>
+        <p:nvSpPr>
+          <p:cNvPr id="3" name="Notes Placeholder 2"/>
+          <p:cNvSpPr>
+            <a:spLocks noGrp="1"/>
+          </p:cNvSpPr>
+          <p:nvPr>
+            <p:ph type="body" idx="3" sz="quarter"/>
+          </p:nvPr>
+        </p:nvSpPr>
+        <p:spPr/>
+        <p:txBody>
+          <a:bodyPr/>
+          <a:lstStyle/>
+          <a:p>
+            <a:r>
+              <a:t>Qualifying density replaced mean AP score because a mean rewards gatekeeping -- a school that only lets its strongest students sit the exam posts a high average.</a:t>
+            </a:r>
+          </a:p>
+        </p:txBody>
+      </p:sp>
+      <p:sp>
+        <p:nvSpPr>
+          <p:cNvPr id="4" name="Slide Number Placeholder 3"/>
+          <p:cNvSpPr>
+            <a:spLocks noGrp="1"/>
+          </p:cNvSpPr>
+          <p:nvPr>
+            <p:ph type="sldNum" idx="5" sz="quarter"/>
+          </p:nvPr>
+        </p:nvSpPr>
+        <p:spPr/>
+      </p:sp>
+    </p:spTree>
+  </p:cSld>
+  <p:clrMapOvr>
+    <a:masterClrMapping/>
+  </p:clrMapOvr>
+</p:notes>
+</file>
+
+<file path=ppt/notesSlides/notesSlide6.xml><?xml version="1.0" encoding="utf-8"?>
+<p:notes xmlns:a="http://schemas.openxmlformats.org/drawingml/2006/main" xmlns:p="http://schemas.openxmlformats.org/presentationml/2006/main" xmlns:r="http://schemas.openxmlformats.org/officeDocument/2006/relationships">
+  <p:cSld>
+    <p:spTree>
+      <p:nvGrpSpPr>
+        <p:cNvPr id="1" name=""/>
+        <p:cNvGrpSpPr/>
+        <p:nvPr/>
+      </p:nvGrpSpPr>
+      <p:grpSpPr>
+        <a:xfrm>
+          <a:off x="0" y="0"/>
+          <a:ext cx="0" cy="0"/>
+          <a:chOff x="0" y="0"/>
+          <a:chExt cx="0" cy="0"/>
+        </a:xfrm>
+      </p:grpSpPr>
+      <p:sp>
+        <p:nvSpPr>
+          <p:cNvPr id="2" name="Slide Image Placeholder 1"/>
+          <p:cNvSpPr>
+            <a:spLocks noGrp="1"/>
+          </p:cNvSpPr>
+          <p:nvPr>
+            <p:ph type="sldImg" idx="2"/>
+          </p:nvPr>
+        </p:nvSpPr>
+        <p:spPr/>
+      </p:sp>
+      <p:sp>
+        <p:nvSpPr>
+          <p:cNvPr id="3" name="Notes Placeholder 2"/>
+          <p:cNvSpPr>
+            <a:spLocks noGrp="1"/>
+          </p:cNvSpPr>
+          <p:nvPr>
+            <p:ph type="body" idx="3" sz="quarter"/>
+          </p:nvPr>
+        </p:nvSpPr>
+        <p:spPr/>
+        <p:txBody>
+          <a:bodyPr/>
+          <a:lstStyle/>
+          <a:p>
+            <a:r>
+              <a:t>The 30% number is the answer to 'did following the literature actually matter?'. Equal weights move only 7%, so the index is stable to reasonable reweighting but genuinely sensitive to dropping performance.</a:t>
+            </a:r>
+          </a:p>
+        </p:txBody>
+      </p:sp>
+      <p:sp>
+        <p:nvSpPr>
+          <p:cNvPr id="4" name="Slide Number Placeholder 3"/>
+          <p:cNvSpPr>
+            <a:spLocks noGrp="1"/>
+          </p:cNvSpPr>
+          <p:nvPr>
+            <p:ph type="sldNum" idx="5" sz="quarter"/>
+          </p:nvPr>
+        </p:nvSpPr>
+        <p:spPr/>
+      </p:sp>
+    </p:spTree>
+  </p:cSld>
+  <p:clrMapOvr>
+    <a:masterClrMapping/>
+  </p:clrMapOvr>
+</p:notes>
+</file>
+
+<file path=ppt/notesSlides/notesSlide7.xml><?xml version="1.0" encoding="utf-8"?>
+<p:notes xmlns:a="http://schemas.openxmlformats.org/drawingml/2006/main" xmlns:p="http://schemas.openxmlformats.org/presentationml/2006/main" xmlns:r="http://schemas.openxmlformats.org/officeDocument/2006/relationships">
+  <p:cSld>
+    <p:spTree>
+      <p:nvGrpSpPr>
+        <p:cNvPr id="1" name=""/>
+        <p:cNvGrpSpPr/>
+        <p:nvPr/>
+      </p:nvGrpSpPr>
+      <p:grpSpPr>
+        <a:xfrm>
+          <a:off x="0" y="0"/>
+          <a:ext cx="0" cy="0"/>
+          <a:chOff x="0" y="0"/>
+          <a:chExt cx="0" cy="0"/>
+        </a:xfrm>
+      </p:grpSpPr>
+      <p:sp>
+        <p:nvSpPr>
+          <p:cNvPr id="2" name="Slide Image Placeholder 1"/>
+          <p:cNvSpPr>
+            <a:spLocks noGrp="1"/>
+          </p:cNvSpPr>
+          <p:nvPr>
+            <p:ph type="sldImg" idx="2"/>
+          </p:nvPr>
+        </p:nvSpPr>
+        <p:spPr/>
+      </p:sp>
+      <p:sp>
+        <p:nvSpPr>
+          <p:cNvPr id="3" name="Notes Placeholder 2"/>
+          <p:cNvSpPr>
+            <a:spLocks noGrp="1"/>
+          </p:cNvSpPr>
+          <p:nvPr>
+            <p:ph type="body" idx="3" sz="quarter"/>
+          </p:nvPr>
+        </p:nvSpPr>
+        <p:spPr/>
+        <p:txBody>
+          <a:bodyPr/>
+          <a:lstStyle/>
+          <a:p>
+            <a:r>
+              <a:t>Key caveat to state out loud: these cuts are relative to our scored population, not an absolute standard. Re-run on a different population and they move.</a:t>
+            </a:r>
+          </a:p>
+        </p:txBody>
+      </p:sp>
+      <p:sp>
+        <p:nvSpPr>
+          <p:cNvPr id="4" name="Slide Number Placeholder 3"/>
+          <p:cNvSpPr>
+            <a:spLocks noGrp="1"/>
+          </p:cNvSpPr>
+          <p:nvPr>
+            <p:ph type="sldNum" idx="5" sz="quarter"/>
+          </p:nvPr>
+        </p:nvSpPr>
+        <p:spPr/>
+      </p:sp>
+    </p:spTree>
+  </p:cSld>
+  <p:clrMapOvr>
+    <a:masterClrMapping/>
+  </p:clrMapOvr>
+</p:notes>
+</file>
+
+<file path=ppt/notesSlides/notesSlide8.xml><?xml version="1.0" encoding="utf-8"?>
+<p:notes xmlns:a="http://schemas.openxmlformats.org/drawingml/2006/main" xmlns:p="http://schemas.openxmlformats.org/presentationml/2006/main" xmlns:r="http://schemas.openxmlformats.org/officeDocument/2006/relationships">
+  <p:cSld>
+    <p:spTree>
+      <p:nvGrpSpPr>
+        <p:cNvPr id="1" name=""/>
+        <p:cNvGrpSpPr/>
+        <p:nvPr/>
+      </p:nvGrpSpPr>
+      <p:grpSpPr>
+        <a:xfrm>
+          <a:off x="0" y="0"/>
+          <a:ext cx="0" cy="0"/>
+          <a:chOff x="0" y="0"/>
+          <a:chExt cx="0" cy="0"/>
+        </a:xfrm>
+      </p:grpSpPr>
+      <p:sp>
+        <p:nvSpPr>
+          <p:cNvPr id="2" name="Slide Image Placeholder 1"/>
+          <p:cNvSpPr>
+            <a:spLocks noGrp="1"/>
+          </p:cNvSpPr>
+          <p:nvPr>
+            <p:ph type="sldImg" idx="2"/>
+          </p:nvPr>
+        </p:nvSpPr>
+        <p:spPr/>
+      </p:sp>
+      <p:sp>
+        <p:nvSpPr>
+          <p:cNvPr id="3" name="Notes Placeholder 2"/>
+          <p:cNvSpPr>
+            <a:spLocks noGrp="1"/>
+          </p:cNvSpPr>
+          <p:nvPr>
+            <p:ph type="body" idx="3" sz="quarter"/>
+          </p:nvPr>
+        </p:nvSpPr>
+        <p:spPr/>
+        <p:txBody>
+          <a:bodyPr/>
+          <a:lstStyle/>
+          <a:p>
+            <a:r>
+              <a:t>The results slide. Walk the four panels left to right: how many, how they differ on an input, then on two things the model never saw.</a:t>
+            </a:r>
+          </a:p>
+        </p:txBody>
+      </p:sp>
+      <p:sp>
+        <p:nvSpPr>
+          <p:cNvPr id="4" name="Slide Number Placeholder 3"/>
+          <p:cNvSpPr>
+            <a:spLocks noGrp="1"/>
+          </p:cNvSpPr>
+          <p:nvPr>
+            <p:ph type="sldNum" idx="5" sz="quarter"/>
+          </p:nvPr>
+        </p:nvSpPr>
+        <p:spPr/>
+      </p:sp>
+    </p:spTree>
+  </p:cSld>
+  <p:clrMapOvr>
+    <a:masterClrMapping/>
+  </p:clrMapOvr>
+</p:notes>
+</file>
+
+<file path=ppt/notesSlides/notesSlide9.xml><?xml version="1.0" encoding="utf-8"?>
+<p:notes xmlns:a="http://schemas.openxmlformats.org/drawingml/2006/main" xmlns:p="http://schemas.openxmlformats.org/presentationml/2006/main" xmlns:r="http://schemas.openxmlformats.org/officeDocument/2006/relationships">
+  <p:cSld>
+    <p:spTree>
+      <p:nvGrpSpPr>
+        <p:cNvPr id="1" name=""/>
+        <p:cNvGrpSpPr/>
+        <p:nvPr/>
+      </p:nvGrpSpPr>
+      <p:grpSpPr>
+        <a:xfrm>
+          <a:off x="0" y="0"/>
+          <a:ext cx="0" cy="0"/>
+          <a:chOff x="0" y="0"/>
+          <a:chExt cx="0" cy="0"/>
+        </a:xfrm>
+      </p:grpSpPr>
+      <p:sp>
+        <p:nvSpPr>
+          <p:cNvPr id="2" name="Slide Image Placeholder 1"/>
+          <p:cNvSpPr>
+            <a:spLocks noGrp="1"/>
+          </p:cNvSpPr>
+          <p:nvPr>
+            <p:ph type="sldImg" idx="2"/>
+          </p:nvPr>
+        </p:nvSpPr>
+        <p:spPr/>
+      </p:sp>
+      <p:sp>
+        <p:nvSpPr>
+          <p:cNvPr id="3" name="Notes Placeholder 2"/>
+          <p:cNvSpPr>
+            <a:spLocks noGrp="1"/>
+          </p:cNvSpPr>
+          <p:nvPr>
+            <p:ph type="body" idx="3" sz="quarter"/>
+          </p:nvPr>
+        </p:nvSpPr>
+        <p:spPr/>
+        <p:txBody>
+          <a:bodyPr/>
+          <a:lstStyle/>
+          <a:p>
+            <a:r>
+              <a:t>Anticipate 'show me a school I know'. Having one on the slide beats improvising.</a:t>
+            </a:r>
+          </a:p>
+        </p:txBody>
+      </p:sp>
+      <p:sp>
+        <p:nvSpPr>
+          <p:cNvPr id="4" name="Slide Number Placeholder 3"/>
+          <p:cNvSpPr>
+            <a:spLocks noGrp="1"/>
+          </p:cNvSpPr>
+          <p:nvPr>
+            <p:ph type="sldNum" idx="5" sz="quarter"/>
+          </p:nvPr>
+        </p:nvSpPr>
+        <p:spPr/>
+      </p:sp>
+    </p:spTree>
+  </p:cSld>
+  <p:clrMapOvr>
+    <a:masterClrMapping/>
+  </p:clrMapOvr>
+</p:notes>
 </file>
 
 <file path=ppt/slideLayouts/slideLayout1.xml><?xml version="1.0" encoding="utf-8"?>
@@ -3226,21 +4699,45 @@
                 </a:solidFill>
                 <a:latin typeface="Arial"/>
               </a:rPr>
-              <a:t>A three-layer modeling system</a:t>
-            </a:r>
-          </a:p>
-        </p:txBody>
-      </p:sp>
-      <p:sp>
-        <p:nvSpPr>
-          <p:cNvPr id="3" name="TextBox 2"/>
+              <a:t>Validation against independent outcomes</a:t>
+            </a:r>
+          </a:p>
+        </p:txBody>
+      </p:sp>
+      <p:pic>
+        <p:nvPicPr>
+          <p:cNvPr id="3" name="Picture 2" descr="rigor_validation.png"/>
+          <p:cNvPicPr>
+            <a:picLocks noChangeAspect="1"/>
+          </p:cNvPicPr>
+          <p:nvPr/>
+        </p:nvPicPr>
+        <p:blipFill>
+          <a:blip r:embed="rId2"/>
+          <a:stretch>
+            <a:fillRect/>
+          </a:stretch>
+        </p:blipFill>
+        <p:spPr>
+          <a:xfrm>
+            <a:off x="411480" y="1519167"/>
+            <a:ext cx="7315200" cy="4734064"/>
+          </a:xfrm>
+          <a:prstGeom prst="rect">
+            <a:avLst/>
+          </a:prstGeom>
+        </p:spPr>
+      </p:pic>
+      <p:sp>
+        <p:nvSpPr>
+          <p:cNvPr id="4" name="TextBox 3"/>
           <p:cNvSpPr txBox="1"/>
           <p:nvPr/>
         </p:nvSpPr>
         <p:spPr>
           <a:xfrm>
-            <a:off x="640080" y="1554480"/>
-            <a:ext cx="10972800" cy="4846320"/>
+            <a:off x="7955279" y="1463040"/>
+            <a:ext cx="3977639" cy="4937760"/>
           </a:xfrm>
           <a:prstGeom prst="rect">
             <a:avLst/>
@@ -3268,7 +4765,7 @@
                 </a:solidFill>
                 <a:latin typeface="Arial"/>
               </a:rPr>
-              <a:t>-  Measurement model: the composite rigor index (the deliverable).</a:t>
+              <a:t>-  SAT rises across tiers (1,066 → 1,288, a 222-point spread), no inversions — and never a model input.</a:t>
             </a:r>
           </a:p>
           <a:p>
@@ -3287,7 +4784,7 @@
                 </a:solidFill>
                 <a:latin typeface="Arial"/>
               </a:rPr>
-              <a:t>-  Unsupervised ML: K-means + hierarchical clustering with PCA (school segments).</a:t>
+              <a:t>-  Graduation rate sharply separates the bottom tier.</a:t>
             </a:r>
           </a:p>
           <a:p>
@@ -3306,7 +4803,7 @@
                 </a:solidFill>
                 <a:latin typeface="Arial"/>
               </a:rPr>
-              <a:t>-  Supervised ML: gradient boosting predicting outcomes (validation).</a:t>
+              <a:t>-  Honest finding: grad rate plateaus at the top — 'most demanding' means performance, not catalog size.</a:t>
             </a:r>
           </a:p>
           <a:p>
@@ -3325,7 +4822,7 @@
                 </a:solidFill>
                 <a:latin typeface="Arial"/>
               </a:rPr>
-              <a:t>-  Rationale: no ground-truth rigor label exists — so an auditable index, validated by ML.</a:t>
+              <a:t>-  Face-validity audit across known schools as a qualitative check.</a:t>
             </a:r>
           </a:p>
         </p:txBody>
@@ -3377,21 +4874,45 @@
                 </a:solidFill>
                 <a:latin typeface="Arial"/>
               </a:rPr>
-              <a:t>Limitations (documented, not hidden)</a:t>
-            </a:r>
-          </a:p>
-        </p:txBody>
-      </p:sp>
-      <p:sp>
-        <p:nvSpPr>
-          <p:cNvPr id="3" name="TextBox 2"/>
+              <a:t>Why opportunity, not test scores</a:t>
+            </a:r>
+          </a:p>
+        </p:txBody>
+      </p:sp>
+      <p:pic>
+        <p:nvPicPr>
+          <p:cNvPr id="3" name="Picture 2" descr="benchmarking_ses.png"/>
+          <p:cNvPicPr>
+            <a:picLocks noChangeAspect="1"/>
+          </p:cNvPicPr>
+          <p:nvPr/>
+        </p:nvPicPr>
+        <p:blipFill>
+          <a:blip r:embed="rId2"/>
+          <a:stretch>
+            <a:fillRect/>
+          </a:stretch>
+        </p:blipFill>
+        <p:spPr>
+          <a:xfrm>
+            <a:off x="411480" y="2508000"/>
+            <a:ext cx="7315200" cy="2756399"/>
+          </a:xfrm>
+          <a:prstGeom prst="rect">
+            <a:avLst/>
+          </a:prstGeom>
+        </p:spPr>
+      </p:pic>
+      <p:sp>
+        <p:nvSpPr>
+          <p:cNvPr id="4" name="TextBox 3"/>
           <p:cNvSpPr txBox="1"/>
           <p:nvPr/>
         </p:nvSpPr>
         <p:spPr>
           <a:xfrm>
-            <a:off x="640080" y="1554480"/>
-            <a:ext cx="10972800" cy="4846320"/>
+            <a:off x="7955279" y="1463040"/>
+            <a:ext cx="3977639" cy="4937760"/>
           </a:xfrm>
           <a:prstGeom prst="rect">
             <a:avLst/>
@@ -3419,7 +4940,7 @@
                 </a:solidFill>
                 <a:latin typeface="Arial"/>
               </a:rPr>
-              <a:t>-  Ecological inference: we measure the school, not the student.</a:t>
+              <a:t>-  The obvious alternative: just rank schools by mean SAT. We tested that.</a:t>
             </a:r>
           </a:p>
           <a:p>
@@ -3438,7 +4959,7 @@
                 </a:solidFill>
                 <a:latin typeface="Arial"/>
               </a:rPr>
-              <a:t>-  Levels, not growth: Reardon's caution — we report the SES-confounding check.</a:t>
+              <a:t>-  SAT correlates with county child poverty at −0.385; our tier, at −0.110.</a:t>
             </a:r>
           </a:p>
           <a:p>
@@ -3457,7 +4978,7 @@
                 </a:solidFill>
                 <a:latin typeface="Arial"/>
               </a:rPr>
-              <a:t>-  Coverage: performance data ~35%, skewed to the recruiting universe.</a:t>
+              <a:t>-  So an outcome measure is ~3.5× more socioeconomically confounded than an opportunity measure.</a:t>
             </a:r>
           </a:p>
           <a:p>
@@ -3476,26 +4997,7 @@
                 </a:solidFill>
                 <a:latin typeface="Arial"/>
               </a:rPr>
-              <a:t>-  Gaps: private-school blind spot (CRDC public-only); per-course AP scores unavailable.</a:t>
-            </a:r>
-          </a:p>
-          <a:p>
-            <a:pPr>
-              <a:lnSpc>
-                <a:spcPct val="105000"/>
-              </a:lnSpc>
-              <a:spcAft>
-                <a:spcPts val="900"/>
-              </a:spcAft>
-            </a:pPr>
-            <a:r>
-              <a:rPr sz="1550" b="0">
-                <a:solidFill>
-                  <a:srgbClr val="1A1A1A"/>
-                </a:solidFill>
-                <a:latin typeface="Arial"/>
-              </a:rPr>
-              <a:t>-  Framing: most map onto NU's internal-data handoff — extension points, not dead ends.</a:t>
+              <a:t>-  This is empirical support for the design choice, not just a literature citation (Reardon / SEDA).</a:t>
             </a:r>
           </a:p>
         </p:txBody>
@@ -3547,21 +5049,45 @@
                 </a:solidFill>
                 <a:latin typeface="Arial"/>
               </a:rPr>
-              <a:t>Grounded in literature</a:t>
-            </a:r>
-          </a:p>
-        </p:txBody>
-      </p:sp>
-      <p:sp>
-        <p:nvSpPr>
-          <p:cNvPr id="3" name="TextBox 2"/>
+              <a:t>Predictive validation — the supervised model</a:t>
+            </a:r>
+          </a:p>
+        </p:txBody>
+      </p:sp>
+      <p:pic>
+        <p:nvPicPr>
+          <p:cNvPr id="3" name="Picture 2" descr="predictive_validation.png"/>
+          <p:cNvPicPr>
+            <a:picLocks noChangeAspect="1"/>
+          </p:cNvPicPr>
+          <p:nvPr/>
+        </p:nvPicPr>
+        <p:blipFill>
+          <a:blip r:embed="rId2"/>
+          <a:stretch>
+            <a:fillRect/>
+          </a:stretch>
+        </p:blipFill>
+        <p:spPr>
+          <a:xfrm>
+            <a:off x="411480" y="2542540"/>
+            <a:ext cx="7315200" cy="2687320"/>
+          </a:xfrm>
+          <a:prstGeom prst="rect">
+            <a:avLst/>
+          </a:prstGeom>
+        </p:spPr>
+      </p:pic>
+      <p:sp>
+        <p:nvSpPr>
+          <p:cNvPr id="4" name="TextBox 3"/>
           <p:cNvSpPr txBox="1"/>
           <p:nvPr/>
         </p:nvSpPr>
         <p:spPr>
           <a:xfrm>
-            <a:off x="640080" y="1554480"/>
-            <a:ext cx="10972800" cy="4846320"/>
+            <a:off x="7955279" y="1463040"/>
+            <a:ext cx="3977639" cy="4937760"/>
           </a:xfrm>
           <a:prstGeom prst="rect">
             <a:avLst/>
@@ -3589,7 +5115,7 @@
                 </a:solidFill>
                 <a:latin typeface="Arial"/>
               </a:rPr>
-              <a:t>-  Adelman (1999, 2006): curriculum intensity predicts degree completion.</a:t>
+              <a:t>-  Design: gradient boosting + linear; grad rate ~ opportunity, SES-controlled (Adelman; Reardon).</a:t>
             </a:r>
           </a:p>
           <a:p>
@@ -3608,7 +5134,7 @@
                 </a:solidFill>
                 <a:latin typeface="Arial"/>
               </a:rPr>
-              <a:t>-  Geiser &amp; Santelices (2004): exam performance predicts; availability does not.</a:t>
+              <a:t>-  Result: opportunity adds +0.05 R² beyond SES — stable across two specs, both model families.</a:t>
             </a:r>
           </a:p>
           <a:p>
@@ -3627,7 +5153,7 @@
                 </a:solidFill>
                 <a:latin typeface="Arial"/>
               </a:rPr>
-              <a:t>-  Reardon / SEDA: levels reproduce SES — check for confounding.</a:t>
+              <a:t>-  Importance: free-lunch rate dominates (0.53) — the outcome is SES-driven…</a:t>
             </a:r>
           </a:p>
           <a:p>
@@ -3646,26 +5172,7 @@
                 </a:solidFill>
                 <a:latin typeface="Arial"/>
               </a:rPr>
-              <a:t>-  Landscape / ECD: keep the indicators transparent.</a:t>
-            </a:r>
-          </a:p>
-          <a:p>
-            <a:pPr>
-              <a:lnSpc>
-                <a:spcPct val="105000"/>
-              </a:lnSpc>
-              <a:spcAft>
-                <a:spcPts val="900"/>
-              </a:spcAft>
-            </a:pPr>
-            <a:r>
-              <a:rPr sz="1550" b="0">
-                <a:solidFill>
-                  <a:srgbClr val="1A1A1A"/>
-                </a:solidFill>
-                <a:latin typeface="Arial"/>
-              </a:rPr>
-              <a:t>-  Jenks/Fisher, Glaser, Cizek &amp; Bunch, Nardo et al.: the tiering methodology.</a:t>
+              <a:t>-  …yet the index correlates with poverty only −0.11 → evidence it is not an SES proxy.</a:t>
             </a:r>
           </a:p>
         </p:txBody>
@@ -3717,7 +5224,182 @@
                 </a:solidFill>
                 <a:latin typeface="Arial"/>
               </a:rPr>
-              <a:t>Next steps (Weeks 6 → 10)</a:t>
+              <a:t>Unsupervised segments</a:t>
+            </a:r>
+          </a:p>
+        </p:txBody>
+      </p:sp>
+      <p:pic>
+        <p:nvPicPr>
+          <p:cNvPr id="3" name="Picture 2" descr="clustering.png"/>
+          <p:cNvPicPr>
+            <a:picLocks noChangeAspect="1"/>
+          </p:cNvPicPr>
+          <p:nvPr/>
+        </p:nvPicPr>
+        <p:blipFill>
+          <a:blip r:embed="rId2"/>
+          <a:stretch>
+            <a:fillRect/>
+          </a:stretch>
+        </p:blipFill>
+        <p:spPr>
+          <a:xfrm>
+            <a:off x="411480" y="2469767"/>
+            <a:ext cx="7315200" cy="2832864"/>
+          </a:xfrm>
+          <a:prstGeom prst="rect">
+            <a:avLst/>
+          </a:prstGeom>
+        </p:spPr>
+      </p:pic>
+      <p:sp>
+        <p:nvSpPr>
+          <p:cNvPr id="4" name="TextBox 3"/>
+          <p:cNvSpPr txBox="1"/>
+          <p:nvPr/>
+        </p:nvSpPr>
+        <p:spPr>
+          <a:xfrm>
+            <a:off x="7955279" y="1463040"/>
+            <a:ext cx="3977639" cy="4937760"/>
+          </a:xfrm>
+          <a:prstGeom prst="rect">
+            <a:avLst/>
+          </a:prstGeom>
+          <a:noFill/>
+        </p:spPr>
+        <p:txBody>
+          <a:bodyPr wrap="square">
+            <a:spAutoFit/>
+          </a:bodyPr>
+          <a:lstStyle/>
+          <a:p>
+            <a:pPr>
+              <a:lnSpc>
+                <a:spcPct val="105000"/>
+              </a:lnSpc>
+              <a:spcAft>
+                <a:spcPts val="900"/>
+              </a:spcAft>
+            </a:pPr>
+            <a:r>
+              <a:rPr sz="1550" b="0">
+                <a:solidFill>
+                  <a:srgbClr val="1A1A1A"/>
+                </a:solidFill>
+                <a:latin typeface="Arial"/>
+              </a:rPr>
+              <a:t>-  K-means (k=4) + hierarchical over PCA components; region, academic profile, funding.</a:t>
+            </a:r>
+          </a:p>
+          <a:p>
+            <a:pPr>
+              <a:lnSpc>
+                <a:spcPct val="105000"/>
+              </a:lnSpc>
+              <a:spcAft>
+                <a:spcPts val="900"/>
+              </a:spcAft>
+            </a:pPr>
+            <a:r>
+              <a:rPr sz="1550" b="0">
+                <a:solidFill>
+                  <a:srgbClr val="1A1A1A"/>
+                </a:solidFill>
+                <a:latin typeface="Arial"/>
+              </a:rPr>
+              <a:t>-  Deliberately excludes rigor_score — otherwise 'do the clusters match the tier?' is circular.</a:t>
+            </a:r>
+          </a:p>
+          <a:p>
+            <a:pPr>
+              <a:lnSpc>
+                <a:spcPct val="105000"/>
+              </a:lnSpc>
+              <a:spcAft>
+                <a:spcPts val="900"/>
+              </a:spcAft>
+            </a:pPr>
+            <a:r>
+              <a:rPr sz="1550" b="0">
+                <a:solidFill>
+                  <a:srgbClr val="1A1A1A"/>
+                </a:solidFill>
+                <a:latin typeface="Arial"/>
+              </a:rPr>
+              <a:t>-  Finding: every cluster spans several tiers — segments describe a different cut of the data.</a:t>
+            </a:r>
+          </a:p>
+          <a:p>
+            <a:pPr>
+              <a:lnSpc>
+                <a:spcPct val="105000"/>
+              </a:lnSpc>
+              <a:spcAft>
+                <a:spcPts val="900"/>
+              </a:spcAft>
+            </a:pPr>
+            <a:r>
+              <a:rPr sz="1550" b="0">
+                <a:solidFill>
+                  <a:srgbClr val="1A1A1A"/>
+                </a:solidFill>
+                <a:latin typeface="Arial"/>
+              </a:rPr>
+              <a:t>-  Limitation: 5,801 complete-case schools — the clustering universe is much smaller than the tiering one.</a:t>
+            </a:r>
+          </a:p>
+        </p:txBody>
+      </p:sp>
+    </p:spTree>
+  </p:cSld>
+  <p:clrMapOvr>
+    <a:masterClrMapping/>
+  </p:clrMapOvr>
+</p:sld>
+</file>
+
+<file path=ppt/slides/slide14.xml><?xml version="1.0" encoding="utf-8"?>
+<p:sld xmlns:a="http://schemas.openxmlformats.org/drawingml/2006/main" xmlns:p="http://schemas.openxmlformats.org/presentationml/2006/main" xmlns:r="http://schemas.openxmlformats.org/officeDocument/2006/relationships">
+  <p:cSld>
+    <p:spTree>
+      <p:nvGrpSpPr>
+        <p:cNvPr id="1" name=""/>
+        <p:cNvGrpSpPr/>
+        <p:nvPr/>
+      </p:nvGrpSpPr>
+      <p:grpSpPr/>
+      <p:sp>
+        <p:nvSpPr>
+          <p:cNvPr id="2" name="TextBox 1"/>
+          <p:cNvSpPr txBox="1"/>
+          <p:nvPr/>
+        </p:nvSpPr>
+        <p:spPr>
+          <a:xfrm>
+            <a:off x="502920" y="274320"/>
+            <a:ext cx="11155680" cy="914400"/>
+          </a:xfrm>
+          <a:prstGeom prst="rect">
+            <a:avLst/>
+          </a:prstGeom>
+          <a:noFill/>
+        </p:spPr>
+        <p:txBody>
+          <a:bodyPr wrap="square">
+            <a:spAutoFit/>
+          </a:bodyPr>
+          <a:lstStyle/>
+          <a:p>
+            <a:r>
+              <a:rPr sz="3000" b="1">
+                <a:solidFill>
+                  <a:srgbClr val="1A1A1A"/>
+                </a:solidFill>
+                <a:latin typeface="Arial"/>
+              </a:rPr>
+              <a:t>A three-layer modeling system</a:t>
             </a:r>
           </a:p>
         </p:txBody>
@@ -3759,7 +5441,7 @@
                 </a:solidFill>
                 <a:latin typeface="Arial"/>
               </a:rPr>
-              <a:t>-  Finalize v4 and commit its generation code (reproducibility).</a:t>
+              <a:t>-  Measurement model: the composite rigor index — the deliverable.</a:t>
             </a:r>
           </a:p>
           <a:p>
@@ -3778,7 +5460,7 @@
                 </a:solidFill>
                 <a:latin typeface="Arial"/>
               </a:rPr>
-              <a:t>-  Separate public/private tiering; second-outcome validation (college-going).</a:t>
+              <a:t>-  Unsupervised ML: K-means + hierarchical clustering with PCA — school segments.</a:t>
             </a:r>
           </a:p>
           <a:p>
@@ -3797,7 +5479,7 @@
                 </a:solidFill>
                 <a:latin typeface="Arial"/>
               </a:rPr>
-              <a:t>-  Methodology handoff guide for NU integration.</a:t>
+              <a:t>-  Supervised ML: gradient boosting predicting outcomes — validation, not the product.</a:t>
             </a:r>
           </a:p>
           <a:p>
@@ -3816,7 +5498,328 @@
                 </a:solidFill>
                 <a:latin typeface="Arial"/>
               </a:rPr>
-              <a:t>-  Final report: Methods, results, limitations.</a:t>
+              <a:t>-  Rationale: no ground-truth rigor label exists — so an auditable index, validated by ML.</a:t>
+            </a:r>
+          </a:p>
+        </p:txBody>
+      </p:sp>
+    </p:spTree>
+  </p:cSld>
+  <p:clrMapOvr>
+    <a:masterClrMapping/>
+  </p:clrMapOvr>
+</p:sld>
+</file>
+
+<file path=ppt/slides/slide15.xml><?xml version="1.0" encoding="utf-8"?>
+<p:sld xmlns:a="http://schemas.openxmlformats.org/drawingml/2006/main" xmlns:p="http://schemas.openxmlformats.org/presentationml/2006/main" xmlns:r="http://schemas.openxmlformats.org/officeDocument/2006/relationships">
+  <p:cSld>
+    <p:spTree>
+      <p:nvGrpSpPr>
+        <p:cNvPr id="1" name=""/>
+        <p:cNvGrpSpPr/>
+        <p:nvPr/>
+      </p:nvGrpSpPr>
+      <p:grpSpPr/>
+      <p:sp>
+        <p:nvSpPr>
+          <p:cNvPr id="2" name="TextBox 1"/>
+          <p:cNvSpPr txBox="1"/>
+          <p:nvPr/>
+        </p:nvSpPr>
+        <p:spPr>
+          <a:xfrm>
+            <a:off x="502920" y="274320"/>
+            <a:ext cx="11155680" cy="914400"/>
+          </a:xfrm>
+          <a:prstGeom prst="rect">
+            <a:avLst/>
+          </a:prstGeom>
+          <a:noFill/>
+        </p:spPr>
+        <p:txBody>
+          <a:bodyPr wrap="square">
+            <a:spAutoFit/>
+          </a:bodyPr>
+          <a:lstStyle/>
+          <a:p>
+            <a:r>
+              <a:rPr sz="3000" b="1">
+                <a:solidFill>
+                  <a:srgbClr val="1A1A1A"/>
+                </a:solidFill>
+                <a:latin typeface="Arial"/>
+              </a:rPr>
+              <a:t>Limitations (documented, not hidden)</a:t>
+            </a:r>
+          </a:p>
+        </p:txBody>
+      </p:sp>
+      <p:sp>
+        <p:nvSpPr>
+          <p:cNvPr id="3" name="TextBox 2"/>
+          <p:cNvSpPr txBox="1"/>
+          <p:nvPr/>
+        </p:nvSpPr>
+        <p:spPr>
+          <a:xfrm>
+            <a:off x="640080" y="1554480"/>
+            <a:ext cx="10972800" cy="4846320"/>
+          </a:xfrm>
+          <a:prstGeom prst="rect">
+            <a:avLst/>
+          </a:prstGeom>
+          <a:noFill/>
+        </p:spPr>
+        <p:txBody>
+          <a:bodyPr wrap="square">
+            <a:spAutoFit/>
+          </a:bodyPr>
+          <a:lstStyle/>
+          <a:p>
+            <a:pPr>
+              <a:lnSpc>
+                <a:spcPct val="105000"/>
+              </a:lnSpc>
+              <a:spcAft>
+                <a:spcPts val="900"/>
+              </a:spcAft>
+            </a:pPr>
+            <a:r>
+              <a:rPr sz="1550" b="0">
+                <a:solidFill>
+                  <a:srgbClr val="1A1A1A"/>
+                </a:solidFill>
+                <a:latin typeface="Arial"/>
+              </a:rPr>
+              <a:t>-  Ecological inference: we measure the school, not the student.</a:t>
+            </a:r>
+          </a:p>
+          <a:p>
+            <a:pPr>
+              <a:lnSpc>
+                <a:spcPct val="105000"/>
+              </a:lnSpc>
+              <a:spcAft>
+                <a:spcPts val="900"/>
+              </a:spcAft>
+            </a:pPr>
+            <a:r>
+              <a:rPr sz="1550" b="0">
+                <a:solidFill>
+                  <a:srgbClr val="1A1A1A"/>
+                </a:solidFill>
+                <a:latin typeface="Arial"/>
+              </a:rPr>
+              <a:t>-  Levels, not growth: Reardon's caution — we report the SES-confounding check.</a:t>
+            </a:r>
+          </a:p>
+          <a:p>
+            <a:pPr>
+              <a:lnSpc>
+                <a:spcPct val="105000"/>
+              </a:lnSpc>
+              <a:spcAft>
+                <a:spcPts val="900"/>
+              </a:spcAft>
+            </a:pPr>
+            <a:r>
+              <a:rPr sz="1550" b="0">
+                <a:solidFill>
+                  <a:srgbClr val="1A1A1A"/>
+                </a:solidFill>
+                <a:latin typeface="Arial"/>
+              </a:rPr>
+              <a:t>-  Coverage: performance data ~35%, skewed to the recruiting universe.</a:t>
+            </a:r>
+          </a:p>
+          <a:p>
+            <a:pPr>
+              <a:lnSpc>
+                <a:spcPct val="105000"/>
+              </a:lnSpc>
+              <a:spcAft>
+                <a:spcPts val="900"/>
+              </a:spcAft>
+            </a:pPr>
+            <a:r>
+              <a:rPr sz="1550" b="0">
+                <a:solidFill>
+                  <a:srgbClr val="1A1A1A"/>
+                </a:solidFill>
+                <a:latin typeface="Arial"/>
+              </a:rPr>
+              <a:t>-  Gaps: private-school blind spot (CRDC public-only); per-course AP scores unavailable.</a:t>
+            </a:r>
+          </a:p>
+          <a:p>
+            <a:pPr>
+              <a:lnSpc>
+                <a:spcPct val="105000"/>
+              </a:lnSpc>
+              <a:spcAft>
+                <a:spcPts val="900"/>
+              </a:spcAft>
+            </a:pPr>
+            <a:r>
+              <a:rPr sz="1550" b="0">
+                <a:solidFill>
+                  <a:srgbClr val="1A1A1A"/>
+                </a:solidFill>
+                <a:latin typeface="Arial"/>
+              </a:rPr>
+              <a:t>-  Fragility: losing CRDC access would reshuffle ~40% of the CRDC-covered population.</a:t>
+            </a:r>
+          </a:p>
+        </p:txBody>
+      </p:sp>
+    </p:spTree>
+  </p:cSld>
+  <p:clrMapOvr>
+    <a:masterClrMapping/>
+  </p:clrMapOvr>
+</p:sld>
+</file>
+
+<file path=ppt/slides/slide16.xml><?xml version="1.0" encoding="utf-8"?>
+<p:sld xmlns:a="http://schemas.openxmlformats.org/drawingml/2006/main" xmlns:p="http://schemas.openxmlformats.org/presentationml/2006/main" xmlns:r="http://schemas.openxmlformats.org/officeDocument/2006/relationships">
+  <p:cSld>
+    <p:spTree>
+      <p:nvGrpSpPr>
+        <p:cNvPr id="1" name=""/>
+        <p:cNvGrpSpPr/>
+        <p:nvPr/>
+      </p:nvGrpSpPr>
+      <p:grpSpPr/>
+      <p:sp>
+        <p:nvSpPr>
+          <p:cNvPr id="2" name="TextBox 1"/>
+          <p:cNvSpPr txBox="1"/>
+          <p:nvPr/>
+        </p:nvSpPr>
+        <p:spPr>
+          <a:xfrm>
+            <a:off x="502920" y="274320"/>
+            <a:ext cx="11155680" cy="914400"/>
+          </a:xfrm>
+          <a:prstGeom prst="rect">
+            <a:avLst/>
+          </a:prstGeom>
+          <a:noFill/>
+        </p:spPr>
+        <p:txBody>
+          <a:bodyPr wrap="square">
+            <a:spAutoFit/>
+          </a:bodyPr>
+          <a:lstStyle/>
+          <a:p>
+            <a:r>
+              <a:rPr sz="3000" b="1">
+                <a:solidFill>
+                  <a:srgbClr val="1A1A1A"/>
+                </a:solidFill>
+                <a:latin typeface="Arial"/>
+              </a:rPr>
+              <a:t>Next steps (Weeks 7 → 10)</a:t>
+            </a:r>
+          </a:p>
+        </p:txBody>
+      </p:sp>
+      <p:sp>
+        <p:nvSpPr>
+          <p:cNvPr id="3" name="TextBox 2"/>
+          <p:cNvSpPr txBox="1"/>
+          <p:nvPr/>
+        </p:nvSpPr>
+        <p:spPr>
+          <a:xfrm>
+            <a:off x="640080" y="1554480"/>
+            <a:ext cx="10972800" cy="4846320"/>
+          </a:xfrm>
+          <a:prstGeom prst="rect">
+            <a:avLst/>
+          </a:prstGeom>
+          <a:noFill/>
+        </p:spPr>
+        <p:txBody>
+          <a:bodyPr wrap="square">
+            <a:spAutoFit/>
+          </a:bodyPr>
+          <a:lstStyle/>
+          <a:p>
+            <a:pPr>
+              <a:lnSpc>
+                <a:spcPct val="105000"/>
+              </a:lnSpc>
+              <a:spcAft>
+                <a:spcPts val="900"/>
+              </a:spcAft>
+            </a:pPr>
+            <a:r>
+              <a:rPr sz="1550" b="0">
+                <a:solidFill>
+                  <a:srgbClr val="1A1A1A"/>
+                </a:solidFill>
+                <a:latin typeface="Arial"/>
+              </a:rPr>
+              <a:t>-  Separate public/private tiering — different feature availability, different models.</a:t>
+            </a:r>
+          </a:p>
+          <a:p>
+            <a:pPr>
+              <a:lnSpc>
+                <a:spcPct val="105000"/>
+              </a:lnSpc>
+              <a:spcAft>
+                <a:spcPts val="900"/>
+              </a:spcAft>
+            </a:pPr>
+            <a:r>
+              <a:rPr sz="1550" b="0">
+                <a:solidFill>
+                  <a:srgbClr val="1A1A1A"/>
+                </a:solidFill>
+                <a:latin typeface="Arial"/>
+              </a:rPr>
+              <a:t>-  Second-outcome validation (college-going), and a post-COVID graduation vintage.</a:t>
+            </a:r>
+          </a:p>
+          <a:p>
+            <a:pPr>
+              <a:lnSpc>
+                <a:spcPct val="105000"/>
+              </a:lnSpc>
+              <a:spcAft>
+                <a:spcPts val="900"/>
+              </a:spcAft>
+            </a:pPr>
+            <a:r>
+              <a:rPr sz="1550" b="0">
+                <a:solidFill>
+                  <a:srgbClr val="1A1A1A"/>
+                </a:solidFill>
+                <a:latin typeface="Arial"/>
+              </a:rPr>
+              <a:t>-  Methodology handoff guide for NU integration.</a:t>
+            </a:r>
+          </a:p>
+          <a:p>
+            <a:pPr>
+              <a:lnSpc>
+                <a:spcPct val="105000"/>
+              </a:lnSpc>
+              <a:spcAft>
+                <a:spcPts val="900"/>
+              </a:spcAft>
+            </a:pPr>
+            <a:r>
+              <a:rPr sz="1550" b="0">
+                <a:solidFill>
+                  <a:srgbClr val="1A1A1A"/>
+                </a:solidFill>
+                <a:latin typeface="Arial"/>
+              </a:rPr>
+              <a:t>-  Final report: methods, results, limitations.</a:t>
             </a:r>
           </a:p>
         </p:txBody>
@@ -3948,7 +5951,7 @@
                 </a:solidFill>
                 <a:latin typeface="Arial"/>
               </a:rPr>
-              <a:t>-  Objective: a transparent, reproducible, defensible methodology to classify high-school rigor…</a:t>
+              <a:t>-  The reader's problem: the same transcript means different things at different schools.</a:t>
             </a:r>
           </a:p>
           <a:p>
@@ -3967,7 +5970,7 @@
                 </a:solidFill>
                 <a:latin typeface="Arial"/>
               </a:rPr>
-              <a:t>-  …built from public data, that NU can adopt and tie to its internal data.</a:t>
+              <a:t>-  Objective: a transparent, reproducible measure of a school's academic rigor — so a student's coursework can be read in the context of what their school actually offered.</a:t>
             </a:r>
           </a:p>
         </p:txBody>
@@ -4492,7 +6495,7 @@
                 </a:solidFill>
                 <a:latin typeface="Arial"/>
               </a:rPr>
-              <a:t>-  v4: adds AP qualifying density + verified IB intensity.</a:t>
+              <a:t>-  Latest revision: AP qualifying density (expected passing exams per student) + a verified IB signal.</a:t>
             </a:r>
           </a:p>
         </p:txBody>
@@ -4648,7 +6651,26 @@
                 </a:solidFill>
                 <a:latin typeface="Arial"/>
               </a:rPr>
-              <a:t>-  Practice: both reported, plus a sensitivity analysis across weighting schemes.</a:t>
+              <a:t>-  Sensitivity: drop the performance components and 30% of schools change tier — the literature-driven change was not cosmetic.</a:t>
+            </a:r>
+          </a:p>
+          <a:p>
+            <a:pPr>
+              <a:lnSpc>
+                <a:spcPct val="105000"/>
+              </a:lnSpc>
+              <a:spcAft>
+                <a:spcPts val="900"/>
+              </a:spcAft>
+            </a:pPr>
+            <a:r>
+              <a:rPr sz="1550" b="0">
+                <a:solidFill>
+                  <a:srgbClr val="1A1A1A"/>
+                </a:solidFill>
+                <a:latin typeface="Arial"/>
+              </a:rPr>
+              <a:t>-  Practice: both reported, across four weighting schemes.</a:t>
             </a:r>
           </a:p>
         </p:txBody>
@@ -4721,8 +6743,8 @@
         </p:blipFill>
         <p:spPr>
           <a:xfrm>
-            <a:off x="411480" y="2193015"/>
-            <a:ext cx="7315200" cy="3386369"/>
+            <a:off x="411480" y="2034653"/>
+            <a:ext cx="7315200" cy="3703092"/>
           </a:xfrm>
           <a:prstGeom prst="rect">
             <a:avLst/>
@@ -4875,14 +6897,14 @@
                 </a:solidFill>
                 <a:latin typeface="Arial"/>
               </a:rPr>
-              <a:t>Validation against independent outcomes</a:t>
+              <a:t>Results — what each tier actually looks like</a:t>
             </a:r>
           </a:p>
         </p:txBody>
       </p:sp>
       <p:pic>
         <p:nvPicPr>
-          <p:cNvPr id="3" name="Picture 2" descr="rigor_validation.png"/>
+          <p:cNvPr id="3" name="Picture 2" descr="tier_profile.png"/>
           <p:cNvPicPr>
             <a:picLocks noChangeAspect="1"/>
           </p:cNvPicPr>
@@ -4896,8 +6918,8 @@
         </p:blipFill>
         <p:spPr>
           <a:xfrm>
-            <a:off x="411480" y="1928949"/>
-            <a:ext cx="7315200" cy="3914500"/>
+            <a:off x="411480" y="2733329"/>
+            <a:ext cx="7315200" cy="2305740"/>
           </a:xfrm>
           <a:prstGeom prst="rect">
             <a:avLst/>
@@ -4941,7 +6963,7 @@
                 </a:solidFill>
                 <a:latin typeface="Arial"/>
               </a:rPr>
-              <a:t>-  SAT: rises across tiers (1052 → 1303), no inversions — and not a model input.</a:t>
+              <a:t>-  21,951 schools scored; 12,441 left unscored rather than imputed.</a:t>
             </a:r>
           </a:p>
           <a:p>
@@ -4960,7 +6982,7 @@
                 </a:solidFill>
                 <a:latin typeface="Arial"/>
               </a:rPr>
-              <a:t>-  Grad rate: sharply separates the bottom tier.</a:t>
+              <a:t>-  AP exam score rises 2.06 → 3.56 across tiers — an index input, so this is internal consistency.</a:t>
             </a:r>
           </a:p>
           <a:p>
@@ -4979,7 +7001,26 @@
                 </a:solidFill>
                 <a:latin typeface="Arial"/>
               </a:rPr>
-              <a:t>-  Honest finding: grad rate/STEM plateau at the top — 'most demanding' = performance, not catalog size.</a:t>
+              <a:t>-  SAT rises 1,066 → 1,288 — not an input, so this is external validation.</a:t>
+            </a:r>
+          </a:p>
+          <a:p>
+            <a:pPr>
+              <a:lnSpc>
+                <a:spcPct val="105000"/>
+              </a:lnSpc>
+              <a:spcAft>
+                <a:spcPts val="900"/>
+              </a:spcAft>
+            </a:pPr>
+            <a:r>
+              <a:rPr sz="1550" b="0">
+                <a:solidFill>
+                  <a:srgbClr val="1A1A1A"/>
+                </a:solidFill>
+                <a:latin typeface="Arial"/>
+              </a:rPr>
+              <a:t>-  Graduation rate separates the bottom tier, then plateaus — reported as found.</a:t>
             </a:r>
           </a:p>
         </p:txBody>
@@ -5031,14 +7072,14 @@
                 </a:solidFill>
                 <a:latin typeface="Arial"/>
               </a:rPr>
-              <a:t>Predictive validation — the supervised model</a:t>
+              <a:t>What comes out, per school</a:t>
             </a:r>
           </a:p>
         </p:txBody>
       </p:sp>
       <p:pic>
         <p:nvPicPr>
-          <p:cNvPr id="3" name="Picture 2" descr="predictive_validation.png"/>
+          <p:cNvPr id="3" name="Picture 2" descr="school_profile.png"/>
           <p:cNvPicPr>
             <a:picLocks noChangeAspect="1"/>
           </p:cNvPicPr>
@@ -5052,8 +7093,8 @@
         </p:blipFill>
         <p:spPr>
           <a:xfrm>
-            <a:off x="411480" y="2542540"/>
-            <a:ext cx="7315200" cy="2687320"/>
+            <a:off x="411480" y="2371921"/>
+            <a:ext cx="7315200" cy="3028556"/>
           </a:xfrm>
           <a:prstGeom prst="rect">
             <a:avLst/>
@@ -5097,7 +7138,7 @@
                 </a:solidFill>
                 <a:latin typeface="Arial"/>
               </a:rPr>
-              <a:t>-  Design: gradient boosting + linear; grad rate ~ opportunity, SES-controlled (Adelman; Reardon).</a:t>
+              <a:t>-  Deliverable: tier, score, percentile, and the components behind it — keyed on CEEB.</a:t>
             </a:r>
           </a:p>
           <a:p>
@@ -5116,7 +7157,7 @@
                 </a:solidFill>
                 <a:latin typeface="Arial"/>
               </a:rPr>
-              <a:t>-  Result: opportunity adds +0.05 R² beyond SES — stable across two specs, both model families.</a:t>
+              <a:t>-  Decomposable by construction: no school gets a tier without a traceable reason.</a:t>
             </a:r>
           </a:p>
           <a:p>
@@ -5135,7 +7176,7 @@
                 </a:solidFill>
                 <a:latin typeface="Arial"/>
               </a:rPr>
-              <a:t>-  Importance: free-lunch rate dominates (0.53) — the outcome is SES-driven…</a:t>
+              <a:t>-  Missingness surfaced: '4 of 5 components' is part of the output, not a footnote.</a:t>
             </a:r>
           </a:p>
           <a:p>
@@ -5154,7 +7195,7 @@
                 </a:solidFill>
                 <a:latin typeface="Arial"/>
               </a:rPr>
-              <a:t>-  …yet the index correlates with poverty only −0.11 → evidence it is not an SES proxy.</a:t>
+              <a:t>-  Face validity: known-selective schools land where domain experts expect.</a:t>
             </a:r>
           </a:p>
         </p:txBody>
@@ -5485,4 +7526,324 @@
   </a:objectDefaults>
   <a:extraClrSchemeLst/>
 </a:theme>
+</file>
+
+<file path=ppt/theme/theme2.xml><?xml version="1.0" encoding="utf-8"?>
+<a:theme xmlns:a="http://schemas.openxmlformats.org/drawingml/2006/main" name="Office Theme">
+  <a:themeElements>
+    <a:clrScheme name="Office">
+      <a:dk1>
+        <a:sysClr val="windowText" lastClr="000000"/>
+      </a:dk1>
+      <a:lt1>
+        <a:sysClr val="window" lastClr="FFFFFF"/>
+      </a:lt1>
+      <a:dk2>
+        <a:srgbClr val="1F497D"/>
+      </a:dk2>
+      <a:lt2>
+        <a:srgbClr val="EEECE1"/>
+      </a:lt2>
+      <a:accent1>
+        <a:srgbClr val="4F81BD"/>
+      </a:accent1>
+      <a:accent2>
+        <a:srgbClr val="C0504D"/>
+      </a:accent2>
+      <a:accent3>
+        <a:srgbClr val="9BBB59"/>
+      </a:accent3>
+      <a:accent4>
+        <a:srgbClr val="8064A2"/>
+      </a:accent4>
+      <a:accent5>
+        <a:srgbClr val="4BACC6"/>
+      </a:accent5>
+      <a:accent6>
+        <a:srgbClr val="F79646"/>
+      </a:accent6>
+      <a:hlink>
+        <a:srgbClr val="0000FF"/>
+      </a:hlink>
+      <a:folHlink>
+        <a:srgbClr val="800080"/>
+      </a:folHlink>
+    </a:clrScheme>
+    <a:fontScheme name="Office">
+      <a:majorFont>
+        <a:latin typeface="Calibri"/>
+        <a:ea typeface=""/>
+        <a:cs typeface=""/>
+        <a:font script="Jpan" typeface="ＭＳ Ｐゴシック"/>
+        <a:font script="Hang" typeface="맑은 고딕"/>
+        <a:font script="Hans" typeface="宋体"/>
+        <a:font script="Hant" typeface="新細明體"/>
+        <a:font script="Arab" typeface="Times New Roman"/>
+        <a:font script="Hebr" typeface="Times New Roman"/>
+        <a:font script="Thai" typeface="Angsana New"/>
+        <a:font script="Ethi" typeface="Nyala"/>
+        <a:font script="Beng" typeface="Vrinda"/>
+        <a:font script="Gujr" typeface="Shruti"/>
+        <a:font script="Khmr" typeface="MoolBoran"/>
+        <a:font script="Knda" typeface="Tunga"/>
+        <a:font script="Guru" typeface="Raavi"/>
+        <a:font script="Cans" typeface="Euphemia"/>
+        <a:font script="Cher" typeface="Plantagenet Cherokee"/>
+        <a:font script="Yiii" typeface="Microsoft Yi Baiti"/>
+        <a:font script="Tibt" typeface="Microsoft Himalaya"/>
+        <a:font script="Thaa" typeface="MV Boli"/>
+        <a:font script="Deva" typeface="Mangal"/>
+        <a:font script="Telu" typeface="Gautami"/>
+        <a:font script="Taml" typeface="Latha"/>
+        <a:font script="Syrc" typeface="Estrangelo Edessa"/>
+        <a:font script="Orya" typeface="Kalinga"/>
+        <a:font script="Mlym" typeface="Kartika"/>
+        <a:font script="Laoo" typeface="DokChampa"/>
+        <a:font script="Sinh" typeface="Iskoola Pota"/>
+        <a:font script="Mong" typeface="Mongolian Baiti"/>
+        <a:font script="Viet" typeface="Times New Roman"/>
+        <a:font script="Uigh" typeface="Microsoft Uighur"/>
+        <a:font script="Geor" typeface="Sylfaen"/>
+      </a:majorFont>
+      <a:minorFont>
+        <a:latin typeface="Calibri"/>
+        <a:ea typeface=""/>
+        <a:cs typeface=""/>
+        <a:font script="Jpan" typeface="ＭＳ Ｐゴシック"/>
+        <a:font script="Hang" typeface="맑은 고딕"/>
+        <a:font script="Hans" typeface="宋体"/>
+        <a:font script="Hant" typeface="新細明體"/>
+        <a:font script="Arab" typeface="Arial"/>
+        <a:font script="Hebr" typeface="Arial"/>
+        <a:font script="Thai" typeface="Cordia New"/>
+        <a:font script="Ethi" typeface="Nyala"/>
+        <a:font script="Beng" typeface="Vrinda"/>
+        <a:font script="Gujr" typeface="Shruti"/>
+        <a:font script="Khmr" typeface="DaunPenh"/>
+        <a:font script="Knda" typeface="Tunga"/>
+        <a:font script="Guru" typeface="Raavi"/>
+        <a:font script="Cans" typeface="Euphemia"/>
+        <a:font script="Cher" typeface="Plantagenet Cherokee"/>
+        <a:font script="Yiii" typeface="Microsoft Yi Baiti"/>
+        <a:font script="Tibt" typeface="Microsoft Himalaya"/>
+        <a:font script="Thaa" typeface="MV Boli"/>
+        <a:font script="Deva" typeface="Mangal"/>
+        <a:font script="Telu" typeface="Gautami"/>
+        <a:font script="Taml" typeface="Latha"/>
+        <a:font script="Syrc" typeface="Estrangelo Edessa"/>
+        <a:font script="Orya" typeface="Kalinga"/>
+        <a:font script="Mlym" typeface="Kartika"/>
+        <a:font script="Laoo" typeface="DokChampa"/>
+        <a:font script="Sinh" typeface="Iskoola Pota"/>
+        <a:font script="Mong" typeface="Mongolian Baiti"/>
+        <a:font script="Viet" typeface="Arial"/>
+        <a:font script="Uigh" typeface="Microsoft Uighur"/>
+        <a:font script="Geor" typeface="Sylfaen"/>
+      </a:minorFont>
+    </a:fontScheme>
+    <a:fmtScheme name="Office">
+      <a:fillStyleLst>
+        <a:solidFill>
+          <a:schemeClr val="phClr"/>
+        </a:solidFill>
+        <a:gradFill rotWithShape="1">
+          <a:gsLst>
+            <a:gs pos="0">
+              <a:schemeClr val="phClr">
+                <a:tint val="50000"/>
+                <a:satMod val="300000"/>
+              </a:schemeClr>
+            </a:gs>
+            <a:gs pos="35000">
+              <a:schemeClr val="phClr">
+                <a:tint val="37000"/>
+                <a:satMod val="300000"/>
+              </a:schemeClr>
+            </a:gs>
+            <a:gs pos="100000">
+              <a:schemeClr val="phClr">
+                <a:tint val="15000"/>
+                <a:satMod val="350000"/>
+              </a:schemeClr>
+            </a:gs>
+          </a:gsLst>
+          <a:lin ang="16200000" scaled="1"/>
+        </a:gradFill>
+        <a:gradFill rotWithShape="1">
+          <a:gsLst>
+            <a:gs pos="0">
+              <a:schemeClr val="phClr">
+                <a:tint val="100000"/>
+                <a:shade val="100000"/>
+                <a:satMod val="130000"/>
+              </a:schemeClr>
+            </a:gs>
+            <a:gs pos="100000">
+              <a:schemeClr val="phClr">
+                <a:tint val="50000"/>
+                <a:shade val="100000"/>
+                <a:satMod val="350000"/>
+              </a:schemeClr>
+            </a:gs>
+          </a:gsLst>
+          <a:lin ang="16200000" scaled="0"/>
+        </a:gradFill>
+      </a:fillStyleLst>
+      <a:lnStyleLst>
+        <a:ln w="9525" cap="flat" cmpd="sng" algn="ctr">
+          <a:solidFill>
+            <a:schemeClr val="phClr">
+              <a:shade val="95000"/>
+              <a:satMod val="105000"/>
+            </a:schemeClr>
+          </a:solidFill>
+          <a:prstDash val="solid"/>
+        </a:ln>
+        <a:ln w="25400" cap="flat" cmpd="sng" algn="ctr">
+          <a:solidFill>
+            <a:schemeClr val="phClr"/>
+          </a:solidFill>
+          <a:prstDash val="solid"/>
+        </a:ln>
+        <a:ln w="38100" cap="flat" cmpd="sng" algn="ctr">
+          <a:solidFill>
+            <a:schemeClr val="phClr"/>
+          </a:solidFill>
+          <a:prstDash val="solid"/>
+        </a:ln>
+      </a:lnStyleLst>
+      <a:effectStyleLst>
+        <a:effectStyle>
+          <a:effectLst>
+            <a:outerShdw blurRad="40000" dist="20000" dir="5400000" rotWithShape="0">
+              <a:srgbClr val="000000">
+                <a:alpha val="38000"/>
+              </a:srgbClr>
+            </a:outerShdw>
+          </a:effectLst>
+        </a:effectStyle>
+        <a:effectStyle>
+          <a:effectLst>
+            <a:outerShdw blurRad="40000" dist="23000" dir="5400000" rotWithShape="0">
+              <a:srgbClr val="000000">
+                <a:alpha val="35000"/>
+              </a:srgbClr>
+            </a:outerShdw>
+          </a:effectLst>
+        </a:effectStyle>
+        <a:effectStyle>
+          <a:effectLst>
+            <a:outerShdw blurRad="40000" dist="23000" dir="5400000" rotWithShape="0">
+              <a:srgbClr val="000000">
+                <a:alpha val="35000"/>
+              </a:srgbClr>
+            </a:outerShdw>
+          </a:effectLst>
+          <a:scene3d>
+            <a:camera prst="orthographicFront">
+              <a:rot lat="0" lon="0" rev="0"/>
+            </a:camera>
+            <a:lightRig rig="threePt" dir="t">
+              <a:rot lat="0" lon="0" rev="1200000"/>
+            </a:lightRig>
+          </a:scene3d>
+          <a:sp3d>
+            <a:bevelT w="63500" h="25400"/>
+          </a:sp3d>
+        </a:effectStyle>
+      </a:effectStyleLst>
+      <a:bgFillStyleLst>
+        <a:solidFill>
+          <a:schemeClr val="phClr"/>
+        </a:solidFill>
+        <a:gradFill rotWithShape="1">
+          <a:gsLst>
+            <a:gs pos="0">
+              <a:schemeClr val="phClr">
+                <a:tint val="40000"/>
+                <a:satMod val="350000"/>
+              </a:schemeClr>
+            </a:gs>
+            <a:gs pos="40000">
+              <a:schemeClr val="phClr">
+                <a:tint val="45000"/>
+                <a:shade val="99000"/>
+                <a:satMod val="350000"/>
+              </a:schemeClr>
+            </a:gs>
+            <a:gs pos="100000">
+              <a:schemeClr val="phClr">
+                <a:shade val="20000"/>
+                <a:satMod val="255000"/>
+              </a:schemeClr>
+            </a:gs>
+          </a:gsLst>
+          <a:path path="circle">
+            <a:fillToRect l="50000" t="-80000" r="50000" b="180000"/>
+          </a:path>
+        </a:gradFill>
+        <a:gradFill rotWithShape="1">
+          <a:gsLst>
+            <a:gs pos="0">
+              <a:schemeClr val="phClr">
+                <a:tint val="80000"/>
+                <a:satMod val="300000"/>
+              </a:schemeClr>
+            </a:gs>
+            <a:gs pos="100000">
+              <a:schemeClr val="phClr">
+                <a:shade val="30000"/>
+                <a:satMod val="200000"/>
+              </a:schemeClr>
+            </a:gs>
+          </a:gsLst>
+          <a:path path="circle">
+            <a:fillToRect l="50000" t="50000" r="50000" b="50000"/>
+          </a:path>
+        </a:gradFill>
+      </a:bgFillStyleLst>
+    </a:fmtScheme>
+  </a:themeElements>
+  <a:objectDefaults>
+    <a:spDef>
+      <a:spPr/>
+      <a:bodyPr/>
+      <a:lstStyle/>
+      <a:style>
+        <a:lnRef idx="1">
+          <a:schemeClr val="accent1"/>
+        </a:lnRef>
+        <a:fillRef idx="3">
+          <a:schemeClr val="accent1"/>
+        </a:fillRef>
+        <a:effectRef idx="2">
+          <a:schemeClr val="accent1"/>
+        </a:effectRef>
+        <a:fontRef idx="minor">
+          <a:schemeClr val="lt1"/>
+        </a:fontRef>
+      </a:style>
+    </a:spDef>
+    <a:lnDef>
+      <a:spPr/>
+      <a:bodyPr/>
+      <a:lstStyle/>
+      <a:style>
+        <a:lnRef idx="2">
+          <a:schemeClr val="accent1"/>
+        </a:lnRef>
+        <a:fillRef idx="0">
+          <a:schemeClr val="accent1"/>
+        </a:fillRef>
+        <a:effectRef idx="1">
+          <a:schemeClr val="accent1"/>
+        </a:effectRef>
+        <a:fontRef idx="minor">
+          <a:schemeClr val="tx1"/>
+        </a:fontRef>
+      </a:style>
+    </a:lnDef>
+  </a:objectDefaults>
+  <a:extraClrSchemeLst/>
+</a:theme>
 </file>
--- a/docs/MSDS_498_Midterm.pptx
+++ b/docs/MSDS_498_Midterm.pptx
@@ -5115,7 +5115,26 @@
                 </a:solidFill>
                 <a:latin typeface="Arial"/>
               </a:rPr>
-              <a:t>-  Design: gradient boosting + linear; grad rate ~ opportunity, SES-controlled (Adelman; Reardon).</a:t>
+              <a:t>-  Design: HistGradientBoosting + linear baseline; grad rate ~ opportunity, SES-controlled (Adelman; Reardon).</a:t>
+            </a:r>
+          </a:p>
+          <a:p>
+            <a:pPr>
+              <a:lnSpc>
+                <a:spcPct val="105000"/>
+              </a:lnSpc>
+              <a:spcAft>
+                <a:spcPts val="900"/>
+              </a:spcAft>
+            </a:pPr>
+            <a:r>
+              <a:rPr sz="1550" b="0">
+                <a:solidFill>
+                  <a:srgbClr val="1A1A1A"/>
+                </a:solidFill>
+                <a:latin typeface="Arial"/>
+              </a:rPr>
+              <a:t>-  Discipline: 80/20 held-out split, fixed seed, permutation importance (10 repeats), R²/RMSE on the test set.</a:t>
             </a:r>
           </a:p>
           <a:p>
@@ -5290,7 +5309,26 @@
                 </a:solidFill>
                 <a:latin typeface="Arial"/>
               </a:rPr>
-              <a:t>-  K-means (k=4) + hierarchical over PCA components; region, academic profile, funding.</a:t>
+              <a:t>-  K-means + hierarchical over PCA components (90% variance retained); region, academic profile, funding.</a:t>
+            </a:r>
+          </a:p>
+          <a:p>
+            <a:pPr>
+              <a:lnSpc>
+                <a:spcPct val="105000"/>
+              </a:lnSpc>
+              <a:spcAft>
+                <a:spcPts val="900"/>
+              </a:spcAft>
+            </a:pPr>
+            <a:r>
+              <a:rPr sz="1550" b="0">
+                <a:solidFill>
+                  <a:srgbClr val="1A1A1A"/>
+                </a:solidFill>
+                <a:latin typeface="Arial"/>
+              </a:rPr>
+              <a:t>-  k=4 selected by gap statistic (Tibshirani et al., 2001), cross-checked against silhouette; the two algorithms compared by adjusted Rand index.</a:t>
             </a:r>
           </a:p>
           <a:p>
@@ -5498,7 +5536,26 @@
                 </a:solidFill>
                 <a:latin typeface="Arial"/>
               </a:rPr>
-              <a:t>-  Rationale: no ground-truth rigor label exists — so an auditable index, validated by ML.</a:t>
+              <a:t>-  Why not train the tier directly: no ground-truth rigor label exists anywhere — inventing one would make the model unfalsifiable.</a:t>
+            </a:r>
+          </a:p>
+          <a:p>
+            <a:pPr>
+              <a:lnSpc>
+                <a:spcPct val="105000"/>
+              </a:lnSpc>
+              <a:spcAft>
+                <a:spcPts val="900"/>
+              </a:spcAft>
+            </a:pPr>
+            <a:r>
+              <a:rPr sz="1550" b="0">
+                <a:solidFill>
+                  <a:srgbClr val="1A1A1A"/>
+                </a:solidFill>
+                <a:latin typeface="Arial"/>
+              </a:rPr>
+              <a:t>-  So: an auditable measurement instrument, validated by ML rather than produced by it.</a:t>
             </a:r>
           </a:p>
         </p:txBody>
@@ -6320,6 +6377,25 @@
                 </a:solidFill>
                 <a:latin typeface="Arial"/>
               </a:rPr>
+              <a:t>-  Ambiguous middle band: an LLM adjudicates the review-tier pairs a threshold cannot settle — each decision logged and auditable.</a:t>
+            </a:r>
+          </a:p>
+          <a:p>
+            <a:pPr>
+              <a:lnSpc>
+                <a:spcPct val="105000"/>
+              </a:lnSpc>
+              <a:spcAft>
+                <a:spcPts val="900"/>
+              </a:spcAft>
+            </a:pPr>
+            <a:r>
+              <a:rPr sz="1550" b="0">
+                <a:solidFill>
+                  <a:srgbClr val="1A1A1A"/>
+                </a:solidFill>
+                <a:latin typeface="Arial"/>
+              </a:rPr>
               <a:t>-  Reporting: match rates reported as a matter of course.</a:t>
             </a:r>
           </a:p>
@@ -6788,7 +6864,7 @@
                 </a:solidFill>
                 <a:latin typeface="Arial"/>
               </a:rPr>
-              <a:t>-  Method: Jenks natural breaks (Jenks, 1967; Fisher, 1958) — cuts at gaps in the distribution.</a:t>
+              <a:t>-  Method: Jenks natural breaks (Jenks, 1967; Fisher, 1958) — 1-D k-means, cutting at gaps in the distribution.</a:t>
             </a:r>
           </a:p>
           <a:p>
